--- a/MobiScan_Presentation_15min.pptx
+++ b/MobiScan_Presentation_15min.pptx
@@ -4565,7 +4565,7 @@
             <a:avLst/>
           </a:prstGeom>
           <a:solidFill>
-            <a:srgbClr val="0D1117"/>
+            <a:srgbClr val="FFFFFF"/>
           </a:solidFill>
           <a:ln>
             <a:noFill/>
@@ -4609,7 +4609,7 @@
             <a:avLst/>
           </a:prstGeom>
           <a:solidFill>
-            <a:srgbClr val="12332C"/>
+            <a:srgbClr val="DEF2EC"/>
           </a:solidFill>
           <a:ln>
             <a:noFill/>
@@ -4664,7 +4664,7 @@
             <a:r>
               <a:rPr sz="1500" b="1">
                 <a:solidFill>
-                  <a:srgbClr val="00E5A0"/>
+                  <a:srgbClr val="007A56"/>
                 </a:solidFill>
                 <a:latin typeface="Segoe UI"/>
               </a:rPr>
@@ -4699,7 +4699,7 @@
             <a:r>
               <a:rPr sz="6600" b="1">
                 <a:solidFill>
-                  <a:srgbClr val="F0F3F6"/>
+                  <a:srgbClr val="1F252D"/>
                 </a:solidFill>
                 <a:latin typeface="Segoe UI"/>
               </a:rPr>
@@ -4734,7 +4734,7 @@
             <a:r>
               <a:rPr sz="1800" b="0">
                 <a:solidFill>
-                  <a:srgbClr val="9AA5B1"/>
+                  <a:srgbClr val="5A6673"/>
                 </a:solidFill>
                 <a:latin typeface="Segoe UI"/>
               </a:rPr>
@@ -4758,11 +4758,11 @@
             <a:avLst/>
           </a:prstGeom>
           <a:solidFill>
-            <a:srgbClr val="1D242E"/>
+            <a:srgbClr val="EDF1F5"/>
           </a:solidFill>
           <a:ln w="12700">
             <a:solidFill>
-              <a:srgbClr val="00E5A0"/>
+              <a:srgbClr val="007A56"/>
             </a:solidFill>
           </a:ln>
           <a:effectLst/>
@@ -4789,7 +4789,7 @@
             <a:r>
               <a:rPr sz="1200" b="1">
                 <a:solidFill>
-                  <a:srgbClr val="00E5A0"/>
+                  <a:srgbClr val="007A56"/>
                 </a:solidFill>
                 <a:latin typeface="Segoe UI"/>
               </a:rPr>
@@ -4813,11 +4813,11 @@
             <a:avLst/>
           </a:prstGeom>
           <a:solidFill>
-            <a:srgbClr val="1D242E"/>
+            <a:srgbClr val="EDF1F5"/>
           </a:solidFill>
           <a:ln w="12700">
             <a:solidFill>
-              <a:srgbClr val="38B2AC"/>
+              <a:srgbClr val="0E7490"/>
             </a:solidFill>
           </a:ln>
           <a:effectLst/>
@@ -4844,7 +4844,7 @@
             <a:r>
               <a:rPr sz="1200" b="1">
                 <a:solidFill>
-                  <a:srgbClr val="38B2AC"/>
+                  <a:srgbClr val="0E7490"/>
                 </a:solidFill>
                 <a:latin typeface="Segoe UI"/>
               </a:rPr>
@@ -4868,11 +4868,11 @@
             <a:avLst/>
           </a:prstGeom>
           <a:solidFill>
-            <a:srgbClr val="1D242E"/>
+            <a:srgbClr val="EDF1F5"/>
           </a:solidFill>
           <a:ln w="12700">
             <a:solidFill>
-              <a:srgbClr val="FFB020"/>
+              <a:srgbClr val="B26B00"/>
             </a:solidFill>
           </a:ln>
           <a:effectLst/>
@@ -4899,7 +4899,7 @@
             <a:r>
               <a:rPr sz="1200" b="1">
                 <a:solidFill>
-                  <a:srgbClr val="FFB020"/>
+                  <a:srgbClr val="B26B00"/>
                 </a:solidFill>
                 <a:latin typeface="Segoe UI"/>
               </a:rPr>
@@ -4934,7 +4934,7 @@
             <a:r>
               <a:rPr sz="1400" b="0">
                 <a:solidFill>
-                  <a:srgbClr val="9AA5B1"/>
+                  <a:srgbClr val="5A6673"/>
                 </a:solidFill>
                 <a:latin typeface="Segoe UI"/>
               </a:rPr>
@@ -4969,7 +4969,7 @@
             <a:r>
               <a:rPr sz="1300" b="0">
                 <a:solidFill>
-                  <a:srgbClr val="00E5A0"/>
+                  <a:srgbClr val="007A56"/>
                 </a:solidFill>
                 <a:latin typeface="Segoe UI"/>
               </a:rPr>
@@ -5011,7 +5011,7 @@
             <a:avLst/>
           </a:prstGeom>
           <a:solidFill>
-            <a:srgbClr val="0D1117"/>
+            <a:srgbClr val="FFFFFF"/>
           </a:solidFill>
           <a:ln>
             <a:noFill/>
@@ -5055,7 +5055,7 @@
             <a:avLst/>
           </a:prstGeom>
           <a:solidFill>
-            <a:srgbClr val="00E5A0"/>
+            <a:srgbClr val="007A56"/>
           </a:solidFill>
           <a:ln>
             <a:noFill/>
@@ -5110,7 +5110,7 @@
             <a:r>
               <a:rPr sz="3000" b="1">
                 <a:solidFill>
-                  <a:srgbClr val="F0F3F6"/>
+                  <a:srgbClr val="1F252D"/>
                 </a:solidFill>
                 <a:latin typeface="Segoe UI"/>
               </a:rPr>
@@ -5145,7 +5145,7 @@
             <a:r>
               <a:rPr sz="1400" b="0">
                 <a:solidFill>
-                  <a:srgbClr val="9AA5B1"/>
+                  <a:srgbClr val="5A6673"/>
                 </a:solidFill>
                 <a:latin typeface="Segoe UI"/>
               </a:rPr>
@@ -5169,7 +5169,7 @@
             <a:avLst/>
           </a:prstGeom>
           <a:solidFill>
-            <a:srgbClr val="272F3A"/>
+            <a:srgbClr val="DDE2E7"/>
           </a:solidFill>
           <a:ln>
             <a:noFill/>
@@ -5215,11 +5215,11 @@
             </a:avLst>
           </a:prstGeom>
           <a:solidFill>
-            <a:srgbClr val="161C24"/>
+            <a:srgbClr val="F6F8FA"/>
           </a:solidFill>
           <a:ln w="12700">
             <a:solidFill>
-              <a:srgbClr val="2A333F"/>
+              <a:srgbClr val="D5DBE1"/>
             </a:solidFill>
           </a:ln>
           <a:effectLst/>
@@ -5272,7 +5272,7 @@
             <a:r>
               <a:rPr sz="1600" b="1">
                 <a:solidFill>
-                  <a:srgbClr val="00E5A0"/>
+                  <a:srgbClr val="007A56"/>
                 </a:solidFill>
                 <a:latin typeface="Segoe UI"/>
               </a:rPr>
@@ -5314,7 +5314,7 @@
             <a:r>
               <a:rPr sz="1350" b="1">
                 <a:solidFill>
-                  <a:srgbClr val="00E5A0"/>
+                  <a:srgbClr val="007A56"/>
                 </a:solidFill>
                 <a:latin typeface="Segoe UI"/>
               </a:rPr>
@@ -5323,7 +5323,7 @@
             <a:r>
               <a:rPr sz="1350">
                 <a:solidFill>
-                  <a:srgbClr val="F0F3F6"/>
+                  <a:srgbClr val="1F252D"/>
                 </a:solidFill>
                 <a:latin typeface="Segoe UI"/>
               </a:rPr>
@@ -5342,7 +5342,7 @@
             <a:r>
               <a:rPr sz="1350" b="1">
                 <a:solidFill>
-                  <a:srgbClr val="00E5A0"/>
+                  <a:srgbClr val="007A56"/>
                 </a:solidFill>
                 <a:latin typeface="Segoe UI"/>
               </a:rPr>
@@ -5351,7 +5351,7 @@
             <a:r>
               <a:rPr sz="1350">
                 <a:solidFill>
-                  <a:srgbClr val="F0F3F6"/>
+                  <a:srgbClr val="1F252D"/>
                 </a:solidFill>
                 <a:latin typeface="Segoe UI"/>
               </a:rPr>
@@ -5370,7 +5370,7 @@
             <a:r>
               <a:rPr sz="1350" b="1">
                 <a:solidFill>
-                  <a:srgbClr val="00E5A0"/>
+                  <a:srgbClr val="007A56"/>
                 </a:solidFill>
                 <a:latin typeface="Segoe UI"/>
               </a:rPr>
@@ -5379,7 +5379,7 @@
             <a:r>
               <a:rPr sz="1350">
                 <a:solidFill>
-                  <a:srgbClr val="F0F3F6"/>
+                  <a:srgbClr val="1F252D"/>
                 </a:solidFill>
                 <a:latin typeface="Segoe UI"/>
               </a:rPr>
@@ -5398,7 +5398,7 @@
             <a:r>
               <a:rPr sz="1350" b="1">
                 <a:solidFill>
-                  <a:srgbClr val="00E5A0"/>
+                  <a:srgbClr val="007A56"/>
                 </a:solidFill>
                 <a:latin typeface="Segoe UI"/>
               </a:rPr>
@@ -5407,7 +5407,7 @@
             <a:r>
               <a:rPr sz="1350">
                 <a:solidFill>
-                  <a:srgbClr val="F0F3F6"/>
+                  <a:srgbClr val="1F252D"/>
                 </a:solidFill>
                 <a:latin typeface="Segoe UI"/>
               </a:rPr>
@@ -5426,7 +5426,7 @@
             <a:r>
               <a:rPr sz="1350" b="1">
                 <a:solidFill>
-                  <a:srgbClr val="00E5A0"/>
+                  <a:srgbClr val="007A56"/>
                 </a:solidFill>
                 <a:latin typeface="Segoe UI"/>
               </a:rPr>
@@ -5435,7 +5435,7 @@
             <a:r>
               <a:rPr sz="1350">
                 <a:solidFill>
-                  <a:srgbClr val="F0F3F6"/>
+                  <a:srgbClr val="1F252D"/>
                 </a:solidFill>
                 <a:latin typeface="Segoe UI"/>
               </a:rPr>
@@ -5454,7 +5454,7 @@
             <a:r>
               <a:rPr sz="1350" b="1">
                 <a:solidFill>
-                  <a:srgbClr val="00E5A0"/>
+                  <a:srgbClr val="007A56"/>
                 </a:solidFill>
                 <a:latin typeface="Segoe UI"/>
               </a:rPr>
@@ -5463,7 +5463,7 @@
             <a:r>
               <a:rPr sz="1350">
                 <a:solidFill>
-                  <a:srgbClr val="F0F3F6"/>
+                  <a:srgbClr val="1F252D"/>
                 </a:solidFill>
                 <a:latin typeface="Segoe UI"/>
               </a:rPr>
@@ -5489,11 +5489,11 @@
             </a:avLst>
           </a:prstGeom>
           <a:solidFill>
-            <a:srgbClr val="161C24"/>
+            <a:srgbClr val="F6F8FA"/>
           </a:solidFill>
           <a:ln w="12700">
             <a:solidFill>
-              <a:srgbClr val="2A333F"/>
+              <a:srgbClr val="D5DBE1"/>
             </a:solidFill>
           </a:ln>
           <a:effectLst/>
@@ -5546,7 +5546,7 @@
             <a:r>
               <a:rPr sz="1600" b="1">
                 <a:solidFill>
-                  <a:srgbClr val="38B2AC"/>
+                  <a:srgbClr val="0E7490"/>
                 </a:solidFill>
                 <a:latin typeface="Segoe UI"/>
               </a:rPr>
@@ -5588,7 +5588,7 @@
             <a:r>
               <a:rPr sz="1350" b="1">
                 <a:solidFill>
-                  <a:srgbClr val="38B2AC"/>
+                  <a:srgbClr val="0E7490"/>
                 </a:solidFill>
                 <a:latin typeface="Segoe UI"/>
               </a:rPr>
@@ -5597,7 +5597,7 @@
             <a:r>
               <a:rPr sz="1350">
                 <a:solidFill>
-                  <a:srgbClr val="F0F3F6"/>
+                  <a:srgbClr val="1F252D"/>
                 </a:solidFill>
                 <a:latin typeface="Segoe UI"/>
               </a:rPr>
@@ -5616,7 +5616,7 @@
             <a:r>
               <a:rPr sz="1350" b="1">
                 <a:solidFill>
-                  <a:srgbClr val="38B2AC"/>
+                  <a:srgbClr val="0E7490"/>
                 </a:solidFill>
                 <a:latin typeface="Segoe UI"/>
               </a:rPr>
@@ -5625,7 +5625,7 @@
             <a:r>
               <a:rPr sz="1350">
                 <a:solidFill>
-                  <a:srgbClr val="F0F3F6"/>
+                  <a:srgbClr val="1F252D"/>
                 </a:solidFill>
                 <a:latin typeface="Segoe UI"/>
               </a:rPr>
@@ -5644,7 +5644,7 @@
             <a:r>
               <a:rPr sz="1350" b="1">
                 <a:solidFill>
-                  <a:srgbClr val="38B2AC"/>
+                  <a:srgbClr val="0E7490"/>
                 </a:solidFill>
                 <a:latin typeface="Segoe UI"/>
               </a:rPr>
@@ -5653,7 +5653,7 @@
             <a:r>
               <a:rPr sz="1350">
                 <a:solidFill>
-                  <a:srgbClr val="F0F3F6"/>
+                  <a:srgbClr val="1F252D"/>
                 </a:solidFill>
                 <a:latin typeface="Segoe UI"/>
               </a:rPr>
@@ -5672,7 +5672,7 @@
             <a:r>
               <a:rPr sz="1350" b="1">
                 <a:solidFill>
-                  <a:srgbClr val="38B2AC"/>
+                  <a:srgbClr val="0E7490"/>
                 </a:solidFill>
                 <a:latin typeface="Segoe UI"/>
               </a:rPr>
@@ -5681,7 +5681,7 @@
             <a:r>
               <a:rPr sz="1350">
                 <a:solidFill>
-                  <a:srgbClr val="F0F3F6"/>
+                  <a:srgbClr val="1F252D"/>
                 </a:solidFill>
                 <a:latin typeface="Segoe UI"/>
               </a:rPr>
@@ -5700,7 +5700,7 @@
             <a:r>
               <a:rPr sz="1350" b="1">
                 <a:solidFill>
-                  <a:srgbClr val="38B2AC"/>
+                  <a:srgbClr val="0E7490"/>
                 </a:solidFill>
                 <a:latin typeface="Segoe UI"/>
               </a:rPr>
@@ -5709,7 +5709,7 @@
             <a:r>
               <a:rPr sz="1350">
                 <a:solidFill>
-                  <a:srgbClr val="F0F3F6"/>
+                  <a:srgbClr val="1F252D"/>
                 </a:solidFill>
                 <a:latin typeface="Segoe UI"/>
               </a:rPr>
@@ -5728,7 +5728,7 @@
             <a:r>
               <a:rPr sz="1350" b="1">
                 <a:solidFill>
-                  <a:srgbClr val="38B2AC"/>
+                  <a:srgbClr val="0E7490"/>
                 </a:solidFill>
                 <a:latin typeface="Segoe UI"/>
               </a:rPr>
@@ -5737,7 +5737,7 @@
             <a:r>
               <a:rPr sz="1350">
                 <a:solidFill>
-                  <a:srgbClr val="F0F3F6"/>
+                  <a:srgbClr val="1F252D"/>
                 </a:solidFill>
                 <a:latin typeface="Segoe UI"/>
               </a:rPr>
@@ -5772,7 +5772,7 @@
             <a:r>
               <a:rPr sz="1000" b="0">
                 <a:solidFill>
-                  <a:srgbClr val="9AA5B1"/>
+                  <a:srgbClr val="5A6673"/>
                 </a:solidFill>
                 <a:latin typeface="Segoe UI"/>
               </a:rPr>
@@ -5807,7 +5807,7 @@
             <a:r>
               <a:rPr sz="1000" b="0">
                 <a:solidFill>
-                  <a:srgbClr val="9AA5B1"/>
+                  <a:srgbClr val="5A6673"/>
                 </a:solidFill>
                 <a:latin typeface="Segoe UI"/>
               </a:rPr>
@@ -5849,7 +5849,7 @@
             <a:avLst/>
           </a:prstGeom>
           <a:solidFill>
-            <a:srgbClr val="0D1117"/>
+            <a:srgbClr val="FFFFFF"/>
           </a:solidFill>
           <a:ln>
             <a:noFill/>
@@ -5893,7 +5893,7 @@
             <a:avLst/>
           </a:prstGeom>
           <a:solidFill>
-            <a:srgbClr val="00E5A0"/>
+            <a:srgbClr val="007A56"/>
           </a:solidFill>
           <a:ln>
             <a:noFill/>
@@ -5948,7 +5948,7 @@
             <a:r>
               <a:rPr sz="3000" b="1">
                 <a:solidFill>
-                  <a:srgbClr val="F0F3F6"/>
+                  <a:srgbClr val="1F252D"/>
                 </a:solidFill>
                 <a:latin typeface="Segoe UI"/>
               </a:rPr>
@@ -5983,7 +5983,7 @@
             <a:r>
               <a:rPr sz="1400" b="0">
                 <a:solidFill>
-                  <a:srgbClr val="9AA5B1"/>
+                  <a:srgbClr val="5A6673"/>
                 </a:solidFill>
                 <a:latin typeface="Segoe UI"/>
               </a:rPr>
@@ -6007,7 +6007,7 @@
             <a:avLst/>
           </a:prstGeom>
           <a:solidFill>
-            <a:srgbClr val="272F3A"/>
+            <a:srgbClr val="DDE2E7"/>
           </a:solidFill>
           <a:ln>
             <a:noFill/>
@@ -6053,11 +6053,11 @@
             </a:avLst>
           </a:prstGeom>
           <a:solidFill>
-            <a:srgbClr val="161C24"/>
+            <a:srgbClr val="F6F8FA"/>
           </a:solidFill>
           <a:ln w="12700">
             <a:solidFill>
-              <a:srgbClr val="2A333F"/>
+              <a:srgbClr val="D5DBE1"/>
             </a:solidFill>
           </a:ln>
           <a:effectLst/>
@@ -6110,7 +6110,7 @@
             <a:r>
               <a:rPr sz="1600" b="1">
                 <a:solidFill>
-                  <a:srgbClr val="00E5A0"/>
+                  <a:srgbClr val="007A56"/>
                 </a:solidFill>
                 <a:latin typeface="Segoe UI"/>
               </a:rPr>
@@ -6152,7 +6152,7 @@
             <a:r>
               <a:rPr sz="1300" b="1">
                 <a:solidFill>
-                  <a:srgbClr val="00E5A0"/>
+                  <a:srgbClr val="007A56"/>
                 </a:solidFill>
                 <a:latin typeface="Segoe UI"/>
               </a:rPr>
@@ -6161,7 +6161,7 @@
             <a:r>
               <a:rPr sz="1300">
                 <a:solidFill>
-                  <a:srgbClr val="F0F3F6"/>
+                  <a:srgbClr val="1F252D"/>
                 </a:solidFill>
                 <a:latin typeface="Segoe UI"/>
               </a:rPr>
@@ -6180,7 +6180,7 @@
             <a:r>
               <a:rPr sz="1300" b="1">
                 <a:solidFill>
-                  <a:srgbClr val="00E5A0"/>
+                  <a:srgbClr val="007A56"/>
                 </a:solidFill>
                 <a:latin typeface="Segoe UI"/>
               </a:rPr>
@@ -6189,7 +6189,7 @@
             <a:r>
               <a:rPr sz="1300">
                 <a:solidFill>
-                  <a:srgbClr val="F0F3F6"/>
+                  <a:srgbClr val="1F252D"/>
                 </a:solidFill>
                 <a:latin typeface="Segoe UI"/>
               </a:rPr>
@@ -6208,7 +6208,7 @@
             <a:r>
               <a:rPr sz="1300" b="1">
                 <a:solidFill>
-                  <a:srgbClr val="00E5A0"/>
+                  <a:srgbClr val="007A56"/>
                 </a:solidFill>
                 <a:latin typeface="Segoe UI"/>
               </a:rPr>
@@ -6217,7 +6217,7 @@
             <a:r>
               <a:rPr sz="1300">
                 <a:solidFill>
-                  <a:srgbClr val="F0F3F6"/>
+                  <a:srgbClr val="1F252D"/>
                 </a:solidFill>
                 <a:latin typeface="Segoe UI"/>
               </a:rPr>
@@ -6236,7 +6236,7 @@
             <a:r>
               <a:rPr sz="1300" b="1">
                 <a:solidFill>
-                  <a:srgbClr val="00E5A0"/>
+                  <a:srgbClr val="007A56"/>
                 </a:solidFill>
                 <a:latin typeface="Segoe UI"/>
               </a:rPr>
@@ -6245,7 +6245,7 @@
             <a:r>
               <a:rPr sz="1300">
                 <a:solidFill>
-                  <a:srgbClr val="F0F3F6"/>
+                  <a:srgbClr val="1F252D"/>
                 </a:solidFill>
                 <a:latin typeface="Segoe UI"/>
               </a:rPr>
@@ -6264,7 +6264,7 @@
             <a:r>
               <a:rPr sz="1300" b="1">
                 <a:solidFill>
-                  <a:srgbClr val="00E5A0"/>
+                  <a:srgbClr val="007A56"/>
                 </a:solidFill>
                 <a:latin typeface="Segoe UI"/>
               </a:rPr>
@@ -6273,7 +6273,7 @@
             <a:r>
               <a:rPr sz="1300">
                 <a:solidFill>
-                  <a:srgbClr val="F0F3F6"/>
+                  <a:srgbClr val="1F252D"/>
                 </a:solidFill>
                 <a:latin typeface="Segoe UI"/>
               </a:rPr>
@@ -6292,7 +6292,7 @@
             <a:r>
               <a:rPr sz="1300" b="1">
                 <a:solidFill>
-                  <a:srgbClr val="00E5A0"/>
+                  <a:srgbClr val="007A56"/>
                 </a:solidFill>
                 <a:latin typeface="Segoe UI"/>
               </a:rPr>
@@ -6301,7 +6301,7 @@
             <a:r>
               <a:rPr sz="1300">
                 <a:solidFill>
-                  <a:srgbClr val="F0F3F6"/>
+                  <a:srgbClr val="1F252D"/>
                 </a:solidFill>
                 <a:latin typeface="Segoe UI"/>
               </a:rPr>
@@ -6320,7 +6320,7 @@
             <a:r>
               <a:rPr sz="1300" b="1">
                 <a:solidFill>
-                  <a:srgbClr val="00E5A0"/>
+                  <a:srgbClr val="007A56"/>
                 </a:solidFill>
                 <a:latin typeface="Segoe UI"/>
               </a:rPr>
@@ -6329,7 +6329,7 @@
             <a:r>
               <a:rPr sz="1300">
                 <a:solidFill>
-                  <a:srgbClr val="F0F3F6"/>
+                  <a:srgbClr val="1F252D"/>
                 </a:solidFill>
                 <a:latin typeface="Segoe UI"/>
               </a:rPr>
@@ -6348,7 +6348,7 @@
             <a:r>
               <a:rPr sz="1300" b="1">
                 <a:solidFill>
-                  <a:srgbClr val="00E5A0"/>
+                  <a:srgbClr val="007A56"/>
                 </a:solidFill>
                 <a:latin typeface="Segoe UI"/>
               </a:rPr>
@@ -6357,7 +6357,7 @@
             <a:r>
               <a:rPr sz="1300">
                 <a:solidFill>
-                  <a:srgbClr val="F0F3F6"/>
+                  <a:srgbClr val="1F252D"/>
                 </a:solidFill>
                 <a:latin typeface="Segoe UI"/>
               </a:rPr>
@@ -6383,11 +6383,11 @@
             </a:avLst>
           </a:prstGeom>
           <a:solidFill>
-            <a:srgbClr val="161C24"/>
+            <a:srgbClr val="F6F8FA"/>
           </a:solidFill>
           <a:ln w="12700">
             <a:solidFill>
-              <a:srgbClr val="2A333F"/>
+              <a:srgbClr val="D5DBE1"/>
             </a:solidFill>
           </a:ln>
           <a:effectLst/>
@@ -6440,7 +6440,7 @@
             <a:r>
               <a:rPr sz="1600" b="1">
                 <a:solidFill>
-                  <a:srgbClr val="38B2AC"/>
+                  <a:srgbClr val="0E7490"/>
                 </a:solidFill>
                 <a:latin typeface="Segoe UI"/>
               </a:rPr>
@@ -6482,7 +6482,7 @@
             <a:r>
               <a:rPr sz="1350">
                 <a:solidFill>
-                  <a:srgbClr val="F0F3F6"/>
+                  <a:srgbClr val="1F252D"/>
                 </a:solidFill>
                 <a:latin typeface="Segoe UI"/>
               </a:rPr>
@@ -6501,7 +6501,7 @@
             <a:r>
               <a:rPr sz="1350">
                 <a:solidFill>
-                  <a:srgbClr val="F0F3F6"/>
+                  <a:srgbClr val="1F252D"/>
                 </a:solidFill>
                 <a:latin typeface="Segoe UI"/>
               </a:rPr>
@@ -6520,7 +6520,7 @@
             <a:r>
               <a:rPr sz="1350">
                 <a:solidFill>
-                  <a:srgbClr val="F0F3F6"/>
+                  <a:srgbClr val="1F252D"/>
                 </a:solidFill>
                 <a:latin typeface="Segoe UI"/>
               </a:rPr>
@@ -6539,7 +6539,7 @@
             <a:r>
               <a:rPr sz="1350">
                 <a:solidFill>
-                  <a:srgbClr val="F0F3F6"/>
+                  <a:srgbClr val="1F252D"/>
                 </a:solidFill>
                 <a:latin typeface="Segoe UI"/>
               </a:rPr>
@@ -6558,7 +6558,7 @@
             <a:r>
               <a:rPr sz="1350">
                 <a:solidFill>
-                  <a:srgbClr val="F0F3F6"/>
+                  <a:srgbClr val="1F252D"/>
                 </a:solidFill>
                 <a:latin typeface="Segoe UI"/>
               </a:rPr>
@@ -6577,7 +6577,7 @@
             <a:r>
               <a:rPr sz="1350">
                 <a:solidFill>
-                  <a:srgbClr val="F0F3F6"/>
+                  <a:srgbClr val="1F252D"/>
                 </a:solidFill>
                 <a:latin typeface="Segoe UI"/>
               </a:rPr>
@@ -6612,7 +6612,7 @@
             <a:r>
               <a:rPr sz="1000" b="0">
                 <a:solidFill>
-                  <a:srgbClr val="9AA5B1"/>
+                  <a:srgbClr val="5A6673"/>
                 </a:solidFill>
                 <a:latin typeface="Segoe UI"/>
               </a:rPr>
@@ -6647,7 +6647,7 @@
             <a:r>
               <a:rPr sz="1000" b="0">
                 <a:solidFill>
-                  <a:srgbClr val="9AA5B1"/>
+                  <a:srgbClr val="5A6673"/>
                 </a:solidFill>
                 <a:latin typeface="Segoe UI"/>
               </a:rPr>
@@ -6689,7 +6689,7 @@
             <a:avLst/>
           </a:prstGeom>
           <a:solidFill>
-            <a:srgbClr val="0D1117"/>
+            <a:srgbClr val="FFFFFF"/>
           </a:solidFill>
           <a:ln>
             <a:noFill/>
@@ -6733,7 +6733,7 @@
             <a:avLst/>
           </a:prstGeom>
           <a:solidFill>
-            <a:srgbClr val="00E5A0"/>
+            <a:srgbClr val="007A56"/>
           </a:solidFill>
           <a:ln>
             <a:noFill/>
@@ -6788,7 +6788,7 @@
             <a:r>
               <a:rPr sz="3000" b="1">
                 <a:solidFill>
-                  <a:srgbClr val="F0F3F6"/>
+                  <a:srgbClr val="1F252D"/>
                 </a:solidFill>
                 <a:latin typeface="Segoe UI"/>
               </a:rPr>
@@ -6823,7 +6823,7 @@
             <a:r>
               <a:rPr sz="1400" b="0">
                 <a:solidFill>
-                  <a:srgbClr val="9AA5B1"/>
+                  <a:srgbClr val="5A6673"/>
                 </a:solidFill>
                 <a:latin typeface="Segoe UI"/>
               </a:rPr>
@@ -6847,7 +6847,7 @@
             <a:avLst/>
           </a:prstGeom>
           <a:solidFill>
-            <a:srgbClr val="272F3A"/>
+            <a:srgbClr val="DDE2E7"/>
           </a:solidFill>
           <a:ln>
             <a:noFill/>
@@ -6902,7 +6902,7 @@
             <a:r>
               <a:rPr sz="1300" b="1">
                 <a:solidFill>
-                  <a:srgbClr val="00E5A0"/>
+                  <a:srgbClr val="007A56"/>
                 </a:solidFill>
                 <a:latin typeface="Segoe UI"/>
               </a:rPr>
@@ -6937,7 +6937,7 @@
             <a:r>
               <a:rPr sz="1300" b="1">
                 <a:solidFill>
-                  <a:srgbClr val="00E5A0"/>
+                  <a:srgbClr val="007A56"/>
                 </a:solidFill>
                 <a:latin typeface="Segoe UI"/>
               </a:rPr>
@@ -6972,7 +6972,7 @@
             <a:r>
               <a:rPr sz="1300" b="1">
                 <a:solidFill>
-                  <a:srgbClr val="00E5A0"/>
+                  <a:srgbClr val="007A56"/>
                 </a:solidFill>
                 <a:latin typeface="Segoe UI"/>
               </a:rPr>
@@ -6998,11 +6998,11 @@
             </a:avLst>
           </a:prstGeom>
           <a:solidFill>
-            <a:srgbClr val="1D242E"/>
+            <a:srgbClr val="EDF1F5"/>
           </a:solidFill>
           <a:ln w="12700">
             <a:solidFill>
-              <a:srgbClr val="2A333F"/>
+              <a:srgbClr val="D5DBE1"/>
             </a:solidFill>
           </a:ln>
           <a:effectLst/>
@@ -7055,7 +7055,7 @@
             <a:r>
               <a:rPr sz="1300" b="1">
                 <a:solidFill>
-                  <a:srgbClr val="F0F3F6"/>
+                  <a:srgbClr val="1F252D"/>
                 </a:solidFill>
                 <a:latin typeface="Consolas"/>
               </a:rPr>
@@ -7090,7 +7090,7 @@
             <a:r>
               <a:rPr sz="1250" b="0">
                 <a:solidFill>
-                  <a:srgbClr val="9AA5B1"/>
+                  <a:srgbClr val="5A6673"/>
                 </a:solidFill>
                 <a:latin typeface="Segoe UI"/>
               </a:rPr>
@@ -7125,7 +7125,7 @@
             <a:r>
               <a:rPr sz="1250" b="1">
                 <a:solidFill>
-                  <a:srgbClr val="00E5A0"/>
+                  <a:srgbClr val="007A56"/>
                 </a:solidFill>
                 <a:latin typeface="Segoe UI"/>
               </a:rPr>
@@ -7151,11 +7151,11 @@
             </a:avLst>
           </a:prstGeom>
           <a:solidFill>
-            <a:srgbClr val="1D242E"/>
+            <a:srgbClr val="EDF1F5"/>
           </a:solidFill>
           <a:ln w="12700">
             <a:solidFill>
-              <a:srgbClr val="2A333F"/>
+              <a:srgbClr val="D5DBE1"/>
             </a:solidFill>
           </a:ln>
           <a:effectLst/>
@@ -7208,7 +7208,7 @@
             <a:r>
               <a:rPr sz="1300" b="1">
                 <a:solidFill>
-                  <a:srgbClr val="F0F3F6"/>
+                  <a:srgbClr val="1F252D"/>
                 </a:solidFill>
                 <a:latin typeface="Consolas"/>
               </a:rPr>
@@ -7243,7 +7243,7 @@
             <a:r>
               <a:rPr sz="1250" b="0">
                 <a:solidFill>
-                  <a:srgbClr val="9AA5B1"/>
+                  <a:srgbClr val="5A6673"/>
                 </a:solidFill>
                 <a:latin typeface="Segoe UI"/>
               </a:rPr>
@@ -7278,7 +7278,7 @@
             <a:r>
               <a:rPr sz="1250" b="1">
                 <a:solidFill>
-                  <a:srgbClr val="00E5A0"/>
+                  <a:srgbClr val="007A56"/>
                 </a:solidFill>
                 <a:latin typeface="Segoe UI"/>
               </a:rPr>
@@ -7304,11 +7304,11 @@
             </a:avLst>
           </a:prstGeom>
           <a:solidFill>
-            <a:srgbClr val="1D242E"/>
+            <a:srgbClr val="EDF1F5"/>
           </a:solidFill>
           <a:ln w="12700">
             <a:solidFill>
-              <a:srgbClr val="2A333F"/>
+              <a:srgbClr val="D5DBE1"/>
             </a:solidFill>
           </a:ln>
           <a:effectLst/>
@@ -7361,7 +7361,7 @@
             <a:r>
               <a:rPr sz="1300" b="1">
                 <a:solidFill>
-                  <a:srgbClr val="F0F3F6"/>
+                  <a:srgbClr val="1F252D"/>
                 </a:solidFill>
                 <a:latin typeface="Consolas"/>
               </a:rPr>
@@ -7396,7 +7396,7 @@
             <a:r>
               <a:rPr sz="1250" b="0">
                 <a:solidFill>
-                  <a:srgbClr val="9AA5B1"/>
+                  <a:srgbClr val="5A6673"/>
                 </a:solidFill>
                 <a:latin typeface="Segoe UI"/>
               </a:rPr>
@@ -7431,7 +7431,7 @@
             <a:r>
               <a:rPr sz="1250" b="1">
                 <a:solidFill>
-                  <a:srgbClr val="38B2AC"/>
+                  <a:srgbClr val="0E7490"/>
                 </a:solidFill>
                 <a:latin typeface="Segoe UI"/>
               </a:rPr>
@@ -7457,11 +7457,11 @@
             </a:avLst>
           </a:prstGeom>
           <a:solidFill>
-            <a:srgbClr val="1D242E"/>
+            <a:srgbClr val="EDF1F5"/>
           </a:solidFill>
           <a:ln w="12700">
             <a:solidFill>
-              <a:srgbClr val="2A333F"/>
+              <a:srgbClr val="D5DBE1"/>
             </a:solidFill>
           </a:ln>
           <a:effectLst/>
@@ -7514,7 +7514,7 @@
             <a:r>
               <a:rPr sz="1300" b="1">
                 <a:solidFill>
-                  <a:srgbClr val="F0F3F6"/>
+                  <a:srgbClr val="1F252D"/>
                 </a:solidFill>
                 <a:latin typeface="Consolas"/>
               </a:rPr>
@@ -7549,7 +7549,7 @@
             <a:r>
               <a:rPr sz="1250" b="0">
                 <a:solidFill>
-                  <a:srgbClr val="9AA5B1"/>
+                  <a:srgbClr val="5A6673"/>
                 </a:solidFill>
                 <a:latin typeface="Segoe UI"/>
               </a:rPr>
@@ -7584,7 +7584,7 @@
             <a:r>
               <a:rPr sz="1250" b="1">
                 <a:solidFill>
-                  <a:srgbClr val="FF4D6A"/>
+                  <a:srgbClr val="C62828"/>
                 </a:solidFill>
                 <a:latin typeface="Segoe UI"/>
               </a:rPr>
@@ -7610,11 +7610,11 @@
             </a:avLst>
           </a:prstGeom>
           <a:solidFill>
-            <a:srgbClr val="1D242E"/>
+            <a:srgbClr val="EDF1F5"/>
           </a:solidFill>
           <a:ln w="12700">
             <a:solidFill>
-              <a:srgbClr val="2A333F"/>
+              <a:srgbClr val="D5DBE1"/>
             </a:solidFill>
           </a:ln>
           <a:effectLst/>
@@ -7667,7 +7667,7 @@
             <a:r>
               <a:rPr sz="1300" b="1">
                 <a:solidFill>
-                  <a:srgbClr val="F0F3F6"/>
+                  <a:srgbClr val="1F252D"/>
                 </a:solidFill>
                 <a:latin typeface="Consolas"/>
               </a:rPr>
@@ -7702,7 +7702,7 @@
             <a:r>
               <a:rPr sz="1250" b="0">
                 <a:solidFill>
-                  <a:srgbClr val="9AA5B1"/>
+                  <a:srgbClr val="5A6673"/>
                 </a:solidFill>
                 <a:latin typeface="Segoe UI"/>
               </a:rPr>
@@ -7737,7 +7737,7 @@
             <a:r>
               <a:rPr sz="1250" b="1">
                 <a:solidFill>
-                  <a:srgbClr val="FFB020"/>
+                  <a:srgbClr val="B26B00"/>
                 </a:solidFill>
                 <a:latin typeface="Segoe UI"/>
               </a:rPr>
@@ -7763,11 +7763,11 @@
             </a:avLst>
           </a:prstGeom>
           <a:solidFill>
-            <a:srgbClr val="1D242E"/>
+            <a:srgbClr val="EDF1F5"/>
           </a:solidFill>
           <a:ln w="12700">
             <a:solidFill>
-              <a:srgbClr val="2A333F"/>
+              <a:srgbClr val="D5DBE1"/>
             </a:solidFill>
           </a:ln>
           <a:effectLst/>
@@ -7820,7 +7820,7 @@
             <a:r>
               <a:rPr sz="1300" b="1">
                 <a:solidFill>
-                  <a:srgbClr val="F0F3F6"/>
+                  <a:srgbClr val="1F252D"/>
                 </a:solidFill>
                 <a:latin typeface="Consolas"/>
               </a:rPr>
@@ -7855,7 +7855,7 @@
             <a:r>
               <a:rPr sz="1250" b="0">
                 <a:solidFill>
-                  <a:srgbClr val="9AA5B1"/>
+                  <a:srgbClr val="5A6673"/>
                 </a:solidFill>
                 <a:latin typeface="Segoe UI"/>
               </a:rPr>
@@ -7890,7 +7890,7 @@
             <a:r>
               <a:rPr sz="1250" b="1">
                 <a:solidFill>
-                  <a:srgbClr val="FF4D6A"/>
+                  <a:srgbClr val="C62828"/>
                 </a:solidFill>
                 <a:latin typeface="Segoe UI"/>
               </a:rPr>
@@ -7916,11 +7916,11 @@
             </a:avLst>
           </a:prstGeom>
           <a:solidFill>
-            <a:srgbClr val="1D242E"/>
+            <a:srgbClr val="EDF1F5"/>
           </a:solidFill>
           <a:ln w="12700">
             <a:solidFill>
-              <a:srgbClr val="2A333F"/>
+              <a:srgbClr val="D5DBE1"/>
             </a:solidFill>
           </a:ln>
           <a:effectLst/>
@@ -7973,7 +7973,7 @@
             <a:r>
               <a:rPr sz="1300" b="1">
                 <a:solidFill>
-                  <a:srgbClr val="F0F3F6"/>
+                  <a:srgbClr val="1F252D"/>
                 </a:solidFill>
                 <a:latin typeface="Consolas"/>
               </a:rPr>
@@ -8008,7 +8008,7 @@
             <a:r>
               <a:rPr sz="1250" b="0">
                 <a:solidFill>
-                  <a:srgbClr val="9AA5B1"/>
+                  <a:srgbClr val="5A6673"/>
                 </a:solidFill>
                 <a:latin typeface="Segoe UI"/>
               </a:rPr>
@@ -8043,7 +8043,7 @@
             <a:r>
               <a:rPr sz="1250" b="1">
                 <a:solidFill>
-                  <a:srgbClr val="38B2AC"/>
+                  <a:srgbClr val="0E7490"/>
                 </a:solidFill>
                 <a:latin typeface="Segoe UI"/>
               </a:rPr>
@@ -8078,7 +8078,7 @@
             <a:r>
               <a:rPr sz="1000" b="0">
                 <a:solidFill>
-                  <a:srgbClr val="9AA5B1"/>
+                  <a:srgbClr val="5A6673"/>
                 </a:solidFill>
                 <a:latin typeface="Segoe UI"/>
               </a:rPr>
@@ -8113,7 +8113,7 @@
             <a:r>
               <a:rPr sz="1000" b="0">
                 <a:solidFill>
-                  <a:srgbClr val="9AA5B1"/>
+                  <a:srgbClr val="5A6673"/>
                 </a:solidFill>
                 <a:latin typeface="Segoe UI"/>
               </a:rPr>
@@ -8155,7 +8155,7 @@
             <a:avLst/>
           </a:prstGeom>
           <a:solidFill>
-            <a:srgbClr val="0D1117"/>
+            <a:srgbClr val="FFFFFF"/>
           </a:solidFill>
           <a:ln>
             <a:noFill/>
@@ -8199,7 +8199,7 @@
             <a:avLst/>
           </a:prstGeom>
           <a:solidFill>
-            <a:srgbClr val="00E5A0"/>
+            <a:srgbClr val="007A56"/>
           </a:solidFill>
           <a:ln>
             <a:noFill/>
@@ -8254,7 +8254,7 @@
             <a:r>
               <a:rPr sz="3000" b="1">
                 <a:solidFill>
-                  <a:srgbClr val="F0F3F6"/>
+                  <a:srgbClr val="1F252D"/>
                 </a:solidFill>
                 <a:latin typeface="Segoe UI"/>
               </a:rPr>
@@ -8289,7 +8289,7 @@
             <a:r>
               <a:rPr sz="1400" b="0">
                 <a:solidFill>
-                  <a:srgbClr val="9AA5B1"/>
+                  <a:srgbClr val="5A6673"/>
                 </a:solidFill>
                 <a:latin typeface="Segoe UI"/>
               </a:rPr>
@@ -8313,7 +8313,7 @@
             <a:avLst/>
           </a:prstGeom>
           <a:solidFill>
-            <a:srgbClr val="272F3A"/>
+            <a:srgbClr val="DDE2E7"/>
           </a:solidFill>
           <a:ln>
             <a:noFill/>
@@ -8359,11 +8359,11 @@
             </a:avLst>
           </a:prstGeom>
           <a:solidFill>
-            <a:srgbClr val="161C24"/>
+            <a:srgbClr val="F6F8FA"/>
           </a:solidFill>
           <a:ln w="12700">
             <a:solidFill>
-              <a:srgbClr val="2A333F"/>
+              <a:srgbClr val="D5DBE1"/>
             </a:solidFill>
           </a:ln>
           <a:effectLst/>
@@ -8416,7 +8416,7 @@
             <a:r>
               <a:rPr sz="1500" b="1">
                 <a:solidFill>
-                  <a:srgbClr val="00E5A0"/>
+                  <a:srgbClr val="007A56"/>
                 </a:solidFill>
                 <a:latin typeface="Segoe UI"/>
               </a:rPr>
@@ -8451,7 +8451,7 @@
             <a:r>
               <a:rPr sz="1200" b="0">
                 <a:solidFill>
-                  <a:srgbClr val="9AA5B1"/>
+                  <a:srgbClr val="5A6673"/>
                 </a:solidFill>
                 <a:latin typeface="Segoe UI"/>
               </a:rPr>
@@ -8477,11 +8477,11 @@
             </a:avLst>
           </a:prstGeom>
           <a:solidFill>
-            <a:srgbClr val="161C24"/>
+            <a:srgbClr val="F6F8FA"/>
           </a:solidFill>
           <a:ln w="12700">
             <a:solidFill>
-              <a:srgbClr val="2A333F"/>
+              <a:srgbClr val="D5DBE1"/>
             </a:solidFill>
           </a:ln>
           <a:effectLst/>
@@ -8534,7 +8534,7 @@
             <a:r>
               <a:rPr sz="1500" b="1">
                 <a:solidFill>
-                  <a:srgbClr val="00E5A0"/>
+                  <a:srgbClr val="007A56"/>
                 </a:solidFill>
                 <a:latin typeface="Segoe UI"/>
               </a:rPr>
@@ -8569,7 +8569,7 @@
             <a:r>
               <a:rPr sz="1200" b="0">
                 <a:solidFill>
-                  <a:srgbClr val="9AA5B1"/>
+                  <a:srgbClr val="5A6673"/>
                 </a:solidFill>
                 <a:latin typeface="Segoe UI"/>
               </a:rPr>
@@ -8595,11 +8595,11 @@
             </a:avLst>
           </a:prstGeom>
           <a:solidFill>
-            <a:srgbClr val="161C24"/>
+            <a:srgbClr val="F6F8FA"/>
           </a:solidFill>
           <a:ln w="12700">
             <a:solidFill>
-              <a:srgbClr val="2A333F"/>
+              <a:srgbClr val="D5DBE1"/>
             </a:solidFill>
           </a:ln>
           <a:effectLst/>
@@ -8652,7 +8652,7 @@
             <a:r>
               <a:rPr sz="1500" b="1">
                 <a:solidFill>
-                  <a:srgbClr val="00E5A0"/>
+                  <a:srgbClr val="007A56"/>
                 </a:solidFill>
                 <a:latin typeface="Segoe UI"/>
               </a:rPr>
@@ -8687,7 +8687,7 @@
             <a:r>
               <a:rPr sz="1200" b="0">
                 <a:solidFill>
-                  <a:srgbClr val="9AA5B1"/>
+                  <a:srgbClr val="5A6673"/>
                 </a:solidFill>
                 <a:latin typeface="Segoe UI"/>
               </a:rPr>
@@ -8713,11 +8713,11 @@
             </a:avLst>
           </a:prstGeom>
           <a:solidFill>
-            <a:srgbClr val="161C24"/>
+            <a:srgbClr val="F6F8FA"/>
           </a:solidFill>
           <a:ln w="12700">
             <a:solidFill>
-              <a:srgbClr val="2A333F"/>
+              <a:srgbClr val="D5DBE1"/>
             </a:solidFill>
           </a:ln>
           <a:effectLst/>
@@ -8770,7 +8770,7 @@
             <a:r>
               <a:rPr sz="1500" b="1">
                 <a:solidFill>
-                  <a:srgbClr val="00E5A0"/>
+                  <a:srgbClr val="007A56"/>
                 </a:solidFill>
                 <a:latin typeface="Segoe UI"/>
               </a:rPr>
@@ -8805,7 +8805,7 @@
             <a:r>
               <a:rPr sz="1200" b="0">
                 <a:solidFill>
-                  <a:srgbClr val="9AA5B1"/>
+                  <a:srgbClr val="5A6673"/>
                 </a:solidFill>
                 <a:latin typeface="Segoe UI"/>
               </a:rPr>
@@ -8831,11 +8831,11 @@
             </a:avLst>
           </a:prstGeom>
           <a:solidFill>
-            <a:srgbClr val="161C24"/>
+            <a:srgbClr val="F6F8FA"/>
           </a:solidFill>
           <a:ln w="12700">
             <a:solidFill>
-              <a:srgbClr val="2A333F"/>
+              <a:srgbClr val="D5DBE1"/>
             </a:solidFill>
           </a:ln>
           <a:effectLst/>
@@ -8888,7 +8888,7 @@
             <a:r>
               <a:rPr sz="1500" b="1">
                 <a:solidFill>
-                  <a:srgbClr val="00E5A0"/>
+                  <a:srgbClr val="007A56"/>
                 </a:solidFill>
                 <a:latin typeface="Segoe UI"/>
               </a:rPr>
@@ -8923,7 +8923,7 @@
             <a:r>
               <a:rPr sz="1200" b="0">
                 <a:solidFill>
-                  <a:srgbClr val="9AA5B1"/>
+                  <a:srgbClr val="5A6673"/>
                 </a:solidFill>
                 <a:latin typeface="Segoe UI"/>
               </a:rPr>
@@ -8949,11 +8949,11 @@
             </a:avLst>
           </a:prstGeom>
           <a:solidFill>
-            <a:srgbClr val="161C24"/>
+            <a:srgbClr val="F6F8FA"/>
           </a:solidFill>
           <a:ln w="12700">
             <a:solidFill>
-              <a:srgbClr val="2A333F"/>
+              <a:srgbClr val="D5DBE1"/>
             </a:solidFill>
           </a:ln>
           <a:effectLst/>
@@ -9006,7 +9006,7 @@
             <a:r>
               <a:rPr sz="1500" b="1">
                 <a:solidFill>
-                  <a:srgbClr val="00E5A0"/>
+                  <a:srgbClr val="007A56"/>
                 </a:solidFill>
                 <a:latin typeface="Segoe UI"/>
               </a:rPr>
@@ -9041,7 +9041,7 @@
             <a:r>
               <a:rPr sz="1200" b="0">
                 <a:solidFill>
-                  <a:srgbClr val="9AA5B1"/>
+                  <a:srgbClr val="5A6673"/>
                 </a:solidFill>
                 <a:latin typeface="Segoe UI"/>
               </a:rPr>
@@ -9067,11 +9067,11 @@
             </a:avLst>
           </a:prstGeom>
           <a:solidFill>
-            <a:srgbClr val="1D242E"/>
+            <a:srgbClr val="EDF1F5"/>
           </a:solidFill>
           <a:ln w="12700">
             <a:solidFill>
-              <a:srgbClr val="2A333F"/>
+              <a:srgbClr val="D5DBE1"/>
             </a:solidFill>
           </a:ln>
           <a:effectLst/>
@@ -9124,7 +9124,7 @@
             <a:r>
               <a:rPr sz="1500" b="1">
                 <a:solidFill>
-                  <a:srgbClr val="38B2AC"/>
+                  <a:srgbClr val="0E7490"/>
                 </a:solidFill>
                 <a:latin typeface="Segoe UI"/>
               </a:rPr>
@@ -9159,7 +9159,7 @@
             <a:r>
               <a:rPr sz="1400" b="0">
                 <a:solidFill>
-                  <a:srgbClr val="F0F3F6"/>
+                  <a:srgbClr val="1F252D"/>
                 </a:solidFill>
                 <a:latin typeface="Segoe UI"/>
               </a:rPr>
@@ -9194,7 +9194,7 @@
             <a:r>
               <a:rPr sz="1000" b="0">
                 <a:solidFill>
-                  <a:srgbClr val="9AA5B1"/>
+                  <a:srgbClr val="5A6673"/>
                 </a:solidFill>
                 <a:latin typeface="Segoe UI"/>
               </a:rPr>
@@ -9229,7 +9229,7 @@
             <a:r>
               <a:rPr sz="1000" b="0">
                 <a:solidFill>
-                  <a:srgbClr val="9AA5B1"/>
+                  <a:srgbClr val="5A6673"/>
                 </a:solidFill>
                 <a:latin typeface="Segoe UI"/>
               </a:rPr>
@@ -9271,7 +9271,7 @@
             <a:avLst/>
           </a:prstGeom>
           <a:solidFill>
-            <a:srgbClr val="0D1117"/>
+            <a:srgbClr val="FFFFFF"/>
           </a:solidFill>
           <a:ln>
             <a:noFill/>
@@ -9315,7 +9315,7 @@
             <a:avLst/>
           </a:prstGeom>
           <a:solidFill>
-            <a:srgbClr val="12332C"/>
+            <a:srgbClr val="DEF2EC"/>
           </a:solidFill>
           <a:ln>
             <a:noFill/>
@@ -9370,7 +9370,7 @@
             <a:r>
               <a:rPr sz="5400" b="1">
                 <a:solidFill>
-                  <a:srgbClr val="F0F3F6"/>
+                  <a:srgbClr val="1F252D"/>
                 </a:solidFill>
                 <a:latin typeface="Segoe UI"/>
               </a:rPr>
@@ -9405,7 +9405,7 @@
             <a:r>
               <a:rPr sz="2400" b="1">
                 <a:solidFill>
-                  <a:srgbClr val="00E5A0"/>
+                  <a:srgbClr val="007A56"/>
                 </a:solidFill>
                 <a:latin typeface="Segoe UI"/>
               </a:rPr>
@@ -9440,7 +9440,7 @@
             <a:r>
               <a:rPr sz="1500" b="0">
                 <a:solidFill>
-                  <a:srgbClr val="9AA5B1"/>
+                  <a:srgbClr val="5A6673"/>
                 </a:solidFill>
                 <a:latin typeface="Segoe UI"/>
               </a:rPr>
@@ -9482,7 +9482,7 @@
             <a:avLst/>
           </a:prstGeom>
           <a:solidFill>
-            <a:srgbClr val="0D1117"/>
+            <a:srgbClr val="FFFFFF"/>
           </a:solidFill>
           <a:ln>
             <a:noFill/>
@@ -9526,7 +9526,7 @@
             <a:avLst/>
           </a:prstGeom>
           <a:solidFill>
-            <a:srgbClr val="00E5A0"/>
+            <a:srgbClr val="007A56"/>
           </a:solidFill>
           <a:ln>
             <a:noFill/>
@@ -9581,7 +9581,7 @@
             <a:r>
               <a:rPr sz="3000" b="1">
                 <a:solidFill>
-                  <a:srgbClr val="F0F3F6"/>
+                  <a:srgbClr val="1F252D"/>
                 </a:solidFill>
                 <a:latin typeface="Segoe UI"/>
               </a:rPr>
@@ -9616,7 +9616,7 @@
             <a:r>
               <a:rPr sz="1400" b="0">
                 <a:solidFill>
-                  <a:srgbClr val="9AA5B1"/>
+                  <a:srgbClr val="5A6673"/>
                 </a:solidFill>
                 <a:latin typeface="Segoe UI"/>
               </a:rPr>
@@ -9640,7 +9640,7 @@
             <a:avLst/>
           </a:prstGeom>
           <a:solidFill>
-            <a:srgbClr val="272F3A"/>
+            <a:srgbClr val="DDE2E7"/>
           </a:solidFill>
           <a:ln>
             <a:noFill/>
@@ -9686,11 +9686,11 @@
             </a:avLst>
           </a:prstGeom>
           <a:solidFill>
-            <a:srgbClr val="161C24"/>
+            <a:srgbClr val="F6F8FA"/>
           </a:solidFill>
           <a:ln w="12700">
             <a:solidFill>
-              <a:srgbClr val="2A333F"/>
+              <a:srgbClr val="D5DBE1"/>
             </a:solidFill>
           </a:ln>
           <a:effectLst/>
@@ -9743,7 +9743,7 @@
             <a:r>
               <a:rPr sz="2000" b="1">
                 <a:solidFill>
-                  <a:srgbClr val="00E5A0"/>
+                  <a:srgbClr val="007A56"/>
                 </a:solidFill>
                 <a:latin typeface="Segoe UI"/>
               </a:rPr>
@@ -9778,7 +9778,7 @@
             <a:r>
               <a:rPr sz="1600" b="1">
                 <a:solidFill>
-                  <a:srgbClr val="F0F3F6"/>
+                  <a:srgbClr val="1F252D"/>
                 </a:solidFill>
                 <a:latin typeface="Segoe UI"/>
               </a:rPr>
@@ -9813,7 +9813,7 @@
             <a:r>
               <a:rPr sz="1100" b="0">
                 <a:solidFill>
-                  <a:srgbClr val="9AA5B1"/>
+                  <a:srgbClr val="5A6673"/>
                 </a:solidFill>
                 <a:latin typeface="Segoe UI"/>
               </a:rPr>
@@ -9837,11 +9837,11 @@
             <a:avLst/>
           </a:prstGeom>
           <a:solidFill>
-            <a:srgbClr val="1D242E"/>
+            <a:srgbClr val="EDF1F5"/>
           </a:solidFill>
           <a:ln w="12700">
             <a:solidFill>
-              <a:srgbClr val="38B2AC"/>
+              <a:srgbClr val="0E7490"/>
             </a:solidFill>
           </a:ln>
           <a:effectLst/>
@@ -9868,7 +9868,7 @@
             <a:r>
               <a:rPr sz="1100" b="1">
                 <a:solidFill>
-                  <a:srgbClr val="38B2AC"/>
+                  <a:srgbClr val="0E7490"/>
                 </a:solidFill>
                 <a:latin typeface="Segoe UI"/>
               </a:rPr>
@@ -9894,11 +9894,11 @@
             </a:avLst>
           </a:prstGeom>
           <a:solidFill>
-            <a:srgbClr val="161C24"/>
+            <a:srgbClr val="F6F8FA"/>
           </a:solidFill>
           <a:ln w="12700">
             <a:solidFill>
-              <a:srgbClr val="2A333F"/>
+              <a:srgbClr val="D5DBE1"/>
             </a:solidFill>
           </a:ln>
           <a:effectLst/>
@@ -9951,7 +9951,7 @@
             <a:r>
               <a:rPr sz="2000" b="1">
                 <a:solidFill>
-                  <a:srgbClr val="00E5A0"/>
+                  <a:srgbClr val="007A56"/>
                 </a:solidFill>
                 <a:latin typeface="Segoe UI"/>
               </a:rPr>
@@ -9986,7 +9986,7 @@
             <a:r>
               <a:rPr sz="1600" b="1">
                 <a:solidFill>
-                  <a:srgbClr val="F0F3F6"/>
+                  <a:srgbClr val="1F252D"/>
                 </a:solidFill>
                 <a:latin typeface="Segoe UI"/>
               </a:rPr>
@@ -10021,7 +10021,7 @@
             <a:r>
               <a:rPr sz="1100" b="0">
                 <a:solidFill>
-                  <a:srgbClr val="9AA5B1"/>
+                  <a:srgbClr val="5A6673"/>
                 </a:solidFill>
                 <a:latin typeface="Segoe UI"/>
               </a:rPr>
@@ -10045,11 +10045,11 @@
             <a:avLst/>
           </a:prstGeom>
           <a:solidFill>
-            <a:srgbClr val="1D242E"/>
+            <a:srgbClr val="EDF1F5"/>
           </a:solidFill>
           <a:ln w="12700">
             <a:solidFill>
-              <a:srgbClr val="38B2AC"/>
+              <a:srgbClr val="0E7490"/>
             </a:solidFill>
           </a:ln>
           <a:effectLst/>
@@ -10076,7 +10076,7 @@
             <a:r>
               <a:rPr sz="1100" b="1">
                 <a:solidFill>
-                  <a:srgbClr val="38B2AC"/>
+                  <a:srgbClr val="0E7490"/>
                 </a:solidFill>
                 <a:latin typeface="Segoe UI"/>
               </a:rPr>
@@ -10102,11 +10102,11 @@
             </a:avLst>
           </a:prstGeom>
           <a:solidFill>
-            <a:srgbClr val="161C24"/>
+            <a:srgbClr val="F6F8FA"/>
           </a:solidFill>
           <a:ln w="12700">
             <a:solidFill>
-              <a:srgbClr val="2A333F"/>
+              <a:srgbClr val="D5DBE1"/>
             </a:solidFill>
           </a:ln>
           <a:effectLst/>
@@ -10159,7 +10159,7 @@
             <a:r>
               <a:rPr sz="2000" b="1">
                 <a:solidFill>
-                  <a:srgbClr val="00E5A0"/>
+                  <a:srgbClr val="007A56"/>
                 </a:solidFill>
                 <a:latin typeface="Segoe UI"/>
               </a:rPr>
@@ -10194,7 +10194,7 @@
             <a:r>
               <a:rPr sz="1600" b="1">
                 <a:solidFill>
-                  <a:srgbClr val="F0F3F6"/>
+                  <a:srgbClr val="1F252D"/>
                 </a:solidFill>
                 <a:latin typeface="Segoe UI"/>
               </a:rPr>
@@ -10229,7 +10229,7 @@
             <a:r>
               <a:rPr sz="1100" b="0">
                 <a:solidFill>
-                  <a:srgbClr val="9AA5B1"/>
+                  <a:srgbClr val="5A6673"/>
                 </a:solidFill>
                 <a:latin typeface="Segoe UI"/>
               </a:rPr>
@@ -10253,11 +10253,11 @@
             <a:avLst/>
           </a:prstGeom>
           <a:solidFill>
-            <a:srgbClr val="1D242E"/>
+            <a:srgbClr val="EDF1F5"/>
           </a:solidFill>
           <a:ln w="12700">
             <a:solidFill>
-              <a:srgbClr val="38B2AC"/>
+              <a:srgbClr val="0E7490"/>
             </a:solidFill>
           </a:ln>
           <a:effectLst/>
@@ -10284,7 +10284,7 @@
             <a:r>
               <a:rPr sz="1100" b="1">
                 <a:solidFill>
-                  <a:srgbClr val="38B2AC"/>
+                  <a:srgbClr val="0E7490"/>
                 </a:solidFill>
                 <a:latin typeface="Segoe UI"/>
               </a:rPr>
@@ -10310,11 +10310,11 @@
             </a:avLst>
           </a:prstGeom>
           <a:solidFill>
-            <a:srgbClr val="161C24"/>
+            <a:srgbClr val="F6F8FA"/>
           </a:solidFill>
           <a:ln w="12700">
             <a:solidFill>
-              <a:srgbClr val="2A333F"/>
+              <a:srgbClr val="D5DBE1"/>
             </a:solidFill>
           </a:ln>
           <a:effectLst/>
@@ -10367,7 +10367,7 @@
             <a:r>
               <a:rPr sz="2000" b="1">
                 <a:solidFill>
-                  <a:srgbClr val="00E5A0"/>
+                  <a:srgbClr val="007A56"/>
                 </a:solidFill>
                 <a:latin typeface="Segoe UI"/>
               </a:rPr>
@@ -10402,7 +10402,7 @@
             <a:r>
               <a:rPr sz="1600" b="1">
                 <a:solidFill>
-                  <a:srgbClr val="F0F3F6"/>
+                  <a:srgbClr val="1F252D"/>
                 </a:solidFill>
                 <a:latin typeface="Segoe UI"/>
               </a:rPr>
@@ -10437,7 +10437,7 @@
             <a:r>
               <a:rPr sz="1100" b="0">
                 <a:solidFill>
-                  <a:srgbClr val="9AA5B1"/>
+                  <a:srgbClr val="5A6673"/>
                 </a:solidFill>
                 <a:latin typeface="Segoe UI"/>
               </a:rPr>
@@ -10461,11 +10461,11 @@
             <a:avLst/>
           </a:prstGeom>
           <a:solidFill>
-            <a:srgbClr val="1D242E"/>
+            <a:srgbClr val="EDF1F5"/>
           </a:solidFill>
           <a:ln w="12700">
             <a:solidFill>
-              <a:srgbClr val="38B2AC"/>
+              <a:srgbClr val="0E7490"/>
             </a:solidFill>
           </a:ln>
           <a:effectLst/>
@@ -10492,7 +10492,7 @@
             <a:r>
               <a:rPr sz="1100" b="1">
                 <a:solidFill>
-                  <a:srgbClr val="38B2AC"/>
+                  <a:srgbClr val="0E7490"/>
                 </a:solidFill>
                 <a:latin typeface="Segoe UI"/>
               </a:rPr>
@@ -10518,11 +10518,11 @@
             </a:avLst>
           </a:prstGeom>
           <a:solidFill>
-            <a:srgbClr val="161C24"/>
+            <a:srgbClr val="F6F8FA"/>
           </a:solidFill>
           <a:ln w="12700">
             <a:solidFill>
-              <a:srgbClr val="2A333F"/>
+              <a:srgbClr val="D5DBE1"/>
             </a:solidFill>
           </a:ln>
           <a:effectLst/>
@@ -10575,7 +10575,7 @@
             <a:r>
               <a:rPr sz="2000" b="1">
                 <a:solidFill>
-                  <a:srgbClr val="00E5A0"/>
+                  <a:srgbClr val="007A56"/>
                 </a:solidFill>
                 <a:latin typeface="Segoe UI"/>
               </a:rPr>
@@ -10610,7 +10610,7 @@
             <a:r>
               <a:rPr sz="1600" b="1">
                 <a:solidFill>
-                  <a:srgbClr val="F0F3F6"/>
+                  <a:srgbClr val="1F252D"/>
                 </a:solidFill>
                 <a:latin typeface="Segoe UI"/>
               </a:rPr>
@@ -10645,7 +10645,7 @@
             <a:r>
               <a:rPr sz="1100" b="0">
                 <a:solidFill>
-                  <a:srgbClr val="9AA5B1"/>
+                  <a:srgbClr val="5A6673"/>
                 </a:solidFill>
                 <a:latin typeface="Segoe UI"/>
               </a:rPr>
@@ -10669,11 +10669,11 @@
             <a:avLst/>
           </a:prstGeom>
           <a:solidFill>
-            <a:srgbClr val="1D242E"/>
+            <a:srgbClr val="EDF1F5"/>
           </a:solidFill>
           <a:ln w="12700">
             <a:solidFill>
-              <a:srgbClr val="38B2AC"/>
+              <a:srgbClr val="0E7490"/>
             </a:solidFill>
           </a:ln>
           <a:effectLst/>
@@ -10700,7 +10700,7 @@
             <a:r>
               <a:rPr sz="1100" b="1">
                 <a:solidFill>
-                  <a:srgbClr val="38B2AC"/>
+                  <a:srgbClr val="0E7490"/>
                 </a:solidFill>
                 <a:latin typeface="Segoe UI"/>
               </a:rPr>
@@ -10726,11 +10726,11 @@
             </a:avLst>
           </a:prstGeom>
           <a:solidFill>
-            <a:srgbClr val="161C24"/>
+            <a:srgbClr val="F6F8FA"/>
           </a:solidFill>
           <a:ln w="12700">
             <a:solidFill>
-              <a:srgbClr val="2A333F"/>
+              <a:srgbClr val="D5DBE1"/>
             </a:solidFill>
           </a:ln>
           <a:effectLst/>
@@ -10783,7 +10783,7 @@
             <a:r>
               <a:rPr sz="2000" b="1">
                 <a:solidFill>
-                  <a:srgbClr val="00E5A0"/>
+                  <a:srgbClr val="007A56"/>
                 </a:solidFill>
                 <a:latin typeface="Segoe UI"/>
               </a:rPr>
@@ -10818,7 +10818,7 @@
             <a:r>
               <a:rPr sz="1600" b="1">
                 <a:solidFill>
-                  <a:srgbClr val="F0F3F6"/>
+                  <a:srgbClr val="1F252D"/>
                 </a:solidFill>
                 <a:latin typeface="Segoe UI"/>
               </a:rPr>
@@ -10853,7 +10853,7 @@
             <a:r>
               <a:rPr sz="1100" b="0">
                 <a:solidFill>
-                  <a:srgbClr val="9AA5B1"/>
+                  <a:srgbClr val="5A6673"/>
                 </a:solidFill>
                 <a:latin typeface="Segoe UI"/>
               </a:rPr>
@@ -10877,11 +10877,11 @@
             <a:avLst/>
           </a:prstGeom>
           <a:solidFill>
-            <a:srgbClr val="1D242E"/>
+            <a:srgbClr val="EDF1F5"/>
           </a:solidFill>
           <a:ln w="12700">
             <a:solidFill>
-              <a:srgbClr val="38B2AC"/>
+              <a:srgbClr val="0E7490"/>
             </a:solidFill>
           </a:ln>
           <a:effectLst/>
@@ -10908,7 +10908,7 @@
             <a:r>
               <a:rPr sz="1100" b="1">
                 <a:solidFill>
-                  <a:srgbClr val="38B2AC"/>
+                  <a:srgbClr val="0E7490"/>
                 </a:solidFill>
                 <a:latin typeface="Segoe UI"/>
               </a:rPr>
@@ -10934,11 +10934,11 @@
             </a:avLst>
           </a:prstGeom>
           <a:solidFill>
-            <a:srgbClr val="161C24"/>
+            <a:srgbClr val="F6F8FA"/>
           </a:solidFill>
           <a:ln w="12700">
             <a:solidFill>
-              <a:srgbClr val="2A333F"/>
+              <a:srgbClr val="D5DBE1"/>
             </a:solidFill>
           </a:ln>
           <a:effectLst/>
@@ -10991,7 +10991,7 @@
             <a:r>
               <a:rPr sz="2000" b="1">
                 <a:solidFill>
-                  <a:srgbClr val="00E5A0"/>
+                  <a:srgbClr val="007A56"/>
                 </a:solidFill>
                 <a:latin typeface="Segoe UI"/>
               </a:rPr>
@@ -11026,7 +11026,7 @@
             <a:r>
               <a:rPr sz="1600" b="1">
                 <a:solidFill>
-                  <a:srgbClr val="F0F3F6"/>
+                  <a:srgbClr val="1F252D"/>
                 </a:solidFill>
                 <a:latin typeface="Segoe UI"/>
               </a:rPr>
@@ -11061,7 +11061,7 @@
             <a:r>
               <a:rPr sz="1100" b="0">
                 <a:solidFill>
-                  <a:srgbClr val="9AA5B1"/>
+                  <a:srgbClr val="5A6673"/>
                 </a:solidFill>
                 <a:latin typeface="Segoe UI"/>
               </a:rPr>
@@ -11085,11 +11085,11 @@
             <a:avLst/>
           </a:prstGeom>
           <a:solidFill>
-            <a:srgbClr val="1D242E"/>
+            <a:srgbClr val="EDF1F5"/>
           </a:solidFill>
           <a:ln w="12700">
             <a:solidFill>
-              <a:srgbClr val="38B2AC"/>
+              <a:srgbClr val="0E7490"/>
             </a:solidFill>
           </a:ln>
           <a:effectLst/>
@@ -11116,7 +11116,7 @@
             <a:r>
               <a:rPr sz="1100" b="1">
                 <a:solidFill>
-                  <a:srgbClr val="38B2AC"/>
+                  <a:srgbClr val="0E7490"/>
                 </a:solidFill>
                 <a:latin typeface="Segoe UI"/>
               </a:rPr>
@@ -11151,7 +11151,7 @@
             <a:r>
               <a:rPr sz="1000" b="0">
                 <a:solidFill>
-                  <a:srgbClr val="9AA5B1"/>
+                  <a:srgbClr val="5A6673"/>
                 </a:solidFill>
                 <a:latin typeface="Segoe UI"/>
               </a:rPr>
@@ -11186,7 +11186,7 @@
             <a:r>
               <a:rPr sz="1000" b="0">
                 <a:solidFill>
-                  <a:srgbClr val="9AA5B1"/>
+                  <a:srgbClr val="5A6673"/>
                 </a:solidFill>
                 <a:latin typeface="Segoe UI"/>
               </a:rPr>
@@ -11228,7 +11228,7 @@
             <a:avLst/>
           </a:prstGeom>
           <a:solidFill>
-            <a:srgbClr val="0D1117"/>
+            <a:srgbClr val="FFFFFF"/>
           </a:solidFill>
           <a:ln>
             <a:noFill/>
@@ -11272,7 +11272,7 @@
             <a:avLst/>
           </a:prstGeom>
           <a:solidFill>
-            <a:srgbClr val="00E5A0"/>
+            <a:srgbClr val="007A56"/>
           </a:solidFill>
           <a:ln>
             <a:noFill/>
@@ -11327,7 +11327,7 @@
             <a:r>
               <a:rPr sz="3000" b="1">
                 <a:solidFill>
-                  <a:srgbClr val="F0F3F6"/>
+                  <a:srgbClr val="1F252D"/>
                 </a:solidFill>
                 <a:latin typeface="Segoe UI"/>
               </a:rPr>
@@ -11362,7 +11362,7 @@
             <a:r>
               <a:rPr sz="1400" b="0">
                 <a:solidFill>
-                  <a:srgbClr val="9AA5B1"/>
+                  <a:srgbClr val="5A6673"/>
                 </a:solidFill>
                 <a:latin typeface="Segoe UI"/>
               </a:rPr>
@@ -11386,7 +11386,7 @@
             <a:avLst/>
           </a:prstGeom>
           <a:solidFill>
-            <a:srgbClr val="272F3A"/>
+            <a:srgbClr val="DDE2E7"/>
           </a:solidFill>
           <a:ln>
             <a:noFill/>
@@ -11432,11 +11432,11 @@
             </a:avLst>
           </a:prstGeom>
           <a:solidFill>
-            <a:srgbClr val="161C24"/>
+            <a:srgbClr val="F6F8FA"/>
           </a:solidFill>
           <a:ln w="12700">
             <a:solidFill>
-              <a:srgbClr val="2A333F"/>
+              <a:srgbClr val="D5DBE1"/>
             </a:solidFill>
           </a:ln>
           <a:effectLst/>
@@ -11489,7 +11489,7 @@
             <a:r>
               <a:rPr sz="1800" b="1">
                 <a:solidFill>
-                  <a:srgbClr val="FF4D6A"/>
+                  <a:srgbClr val="C62828"/>
                 </a:solidFill>
                 <a:latin typeface="Segoe UI"/>
               </a:rPr>
@@ -11531,7 +11531,7 @@
             <a:r>
               <a:rPr sz="1400">
                 <a:solidFill>
-                  <a:srgbClr val="F0F3F6"/>
+                  <a:srgbClr val="1F252D"/>
                 </a:solidFill>
                 <a:latin typeface="Segoe UI"/>
               </a:rPr>
@@ -11550,7 +11550,7 @@
             <a:r>
               <a:rPr sz="1400">
                 <a:solidFill>
-                  <a:srgbClr val="F0F3F6"/>
+                  <a:srgbClr val="1F252D"/>
                 </a:solidFill>
                 <a:latin typeface="Segoe UI"/>
               </a:rPr>
@@ -11569,7 +11569,7 @@
             <a:r>
               <a:rPr sz="1400">
                 <a:solidFill>
-                  <a:srgbClr val="F0F3F6"/>
+                  <a:srgbClr val="1F252D"/>
                 </a:solidFill>
                 <a:latin typeface="Segoe UI"/>
               </a:rPr>
@@ -11588,7 +11588,7 @@
             <a:r>
               <a:rPr sz="1400">
                 <a:solidFill>
-                  <a:srgbClr val="F0F3F6"/>
+                  <a:srgbClr val="1F252D"/>
                 </a:solidFill>
                 <a:latin typeface="Segoe UI"/>
               </a:rPr>
@@ -11607,7 +11607,7 @@
             <a:r>
               <a:rPr sz="1400">
                 <a:solidFill>
-                  <a:srgbClr val="F0F3F6"/>
+                  <a:srgbClr val="1F252D"/>
                 </a:solidFill>
                 <a:latin typeface="Segoe UI"/>
               </a:rPr>
@@ -11626,7 +11626,7 @@
             <a:r>
               <a:rPr sz="1400">
                 <a:solidFill>
-                  <a:srgbClr val="F0F3F6"/>
+                  <a:srgbClr val="1F252D"/>
                 </a:solidFill>
                 <a:latin typeface="Segoe UI"/>
               </a:rPr>
@@ -11652,11 +11652,11 @@
             </a:avLst>
           </a:prstGeom>
           <a:solidFill>
-            <a:srgbClr val="161C24"/>
+            <a:srgbClr val="F6F8FA"/>
           </a:solidFill>
           <a:ln w="12700">
             <a:solidFill>
-              <a:srgbClr val="2A333F"/>
+              <a:srgbClr val="D5DBE1"/>
             </a:solidFill>
           </a:ln>
           <a:effectLst/>
@@ -11709,7 +11709,7 @@
             <a:r>
               <a:rPr sz="1800" b="1">
                 <a:solidFill>
-                  <a:srgbClr val="00E5A0"/>
+                  <a:srgbClr val="007A56"/>
                 </a:solidFill>
                 <a:latin typeface="Segoe UI"/>
               </a:rPr>
@@ -11751,7 +11751,7 @@
             <a:r>
               <a:rPr sz="1400">
                 <a:solidFill>
-                  <a:srgbClr val="F0F3F6"/>
+                  <a:srgbClr val="1F252D"/>
                 </a:solidFill>
                 <a:latin typeface="Segoe UI"/>
               </a:rPr>
@@ -11770,7 +11770,7 @@
             <a:r>
               <a:rPr sz="1400">
                 <a:solidFill>
-                  <a:srgbClr val="F0F3F6"/>
+                  <a:srgbClr val="1F252D"/>
                 </a:solidFill>
                 <a:latin typeface="Segoe UI"/>
               </a:rPr>
@@ -11789,7 +11789,7 @@
             <a:r>
               <a:rPr sz="1400">
                 <a:solidFill>
-                  <a:srgbClr val="F0F3F6"/>
+                  <a:srgbClr val="1F252D"/>
                 </a:solidFill>
                 <a:latin typeface="Segoe UI"/>
               </a:rPr>
@@ -11808,7 +11808,7 @@
             <a:r>
               <a:rPr sz="1400">
                 <a:solidFill>
-                  <a:srgbClr val="F0F3F6"/>
+                  <a:srgbClr val="1F252D"/>
                 </a:solidFill>
                 <a:latin typeface="Segoe UI"/>
               </a:rPr>
@@ -11827,7 +11827,7 @@
             <a:r>
               <a:rPr sz="1400">
                 <a:solidFill>
-                  <a:srgbClr val="F0F3F6"/>
+                  <a:srgbClr val="1F252D"/>
                 </a:solidFill>
                 <a:latin typeface="Segoe UI"/>
               </a:rPr>
@@ -11846,7 +11846,7 @@
             <a:r>
               <a:rPr sz="1400">
                 <a:solidFill>
-                  <a:srgbClr val="F0F3F6"/>
+                  <a:srgbClr val="1F252D"/>
                 </a:solidFill>
                 <a:latin typeface="Segoe UI"/>
               </a:rPr>
@@ -11881,7 +11881,7 @@
             <a:r>
               <a:rPr sz="1000" b="0">
                 <a:solidFill>
-                  <a:srgbClr val="9AA5B1"/>
+                  <a:srgbClr val="5A6673"/>
                 </a:solidFill>
                 <a:latin typeface="Segoe UI"/>
               </a:rPr>
@@ -11916,7 +11916,7 @@
             <a:r>
               <a:rPr sz="1000" b="0">
                 <a:solidFill>
-                  <a:srgbClr val="9AA5B1"/>
+                  <a:srgbClr val="5A6673"/>
                 </a:solidFill>
                 <a:latin typeface="Segoe UI"/>
               </a:rPr>
@@ -11958,7 +11958,7 @@
             <a:avLst/>
           </a:prstGeom>
           <a:solidFill>
-            <a:srgbClr val="0D1117"/>
+            <a:srgbClr val="FFFFFF"/>
           </a:solidFill>
           <a:ln>
             <a:noFill/>
@@ -12002,7 +12002,7 @@
             <a:avLst/>
           </a:prstGeom>
           <a:solidFill>
-            <a:srgbClr val="00E5A0"/>
+            <a:srgbClr val="007A56"/>
           </a:solidFill>
           <a:ln>
             <a:noFill/>
@@ -12057,7 +12057,7 @@
             <a:r>
               <a:rPr sz="3000" b="1">
                 <a:solidFill>
-                  <a:srgbClr val="F0F3F6"/>
+                  <a:srgbClr val="1F252D"/>
                 </a:solidFill>
                 <a:latin typeface="Segoe UI"/>
               </a:rPr>
@@ -12092,7 +12092,7 @@
             <a:r>
               <a:rPr sz="1400" b="0">
                 <a:solidFill>
-                  <a:srgbClr val="9AA5B1"/>
+                  <a:srgbClr val="5A6673"/>
                 </a:solidFill>
                 <a:latin typeface="Segoe UI"/>
               </a:rPr>
@@ -12116,7 +12116,7 @@
             <a:avLst/>
           </a:prstGeom>
           <a:solidFill>
-            <a:srgbClr val="272F3A"/>
+            <a:srgbClr val="DDE2E7"/>
           </a:solidFill>
           <a:ln>
             <a:noFill/>
@@ -12162,11 +12162,11 @@
             </a:avLst>
           </a:prstGeom>
           <a:solidFill>
-            <a:srgbClr val="161C24"/>
+            <a:srgbClr val="F6F8FA"/>
           </a:solidFill>
           <a:ln w="17780">
             <a:solidFill>
-              <a:srgbClr val="00E5A0"/>
+              <a:srgbClr val="007A56"/>
             </a:solidFill>
           </a:ln>
           <a:effectLst/>
@@ -12219,7 +12219,7 @@
             <a:r>
               <a:rPr sz="1400" b="1">
                 <a:solidFill>
-                  <a:srgbClr val="00E5A0"/>
+                  <a:srgbClr val="007A56"/>
                 </a:solidFill>
                 <a:latin typeface="Segoe UI"/>
               </a:rPr>
@@ -12254,7 +12254,7 @@
             <a:r>
               <a:rPr sz="1100" b="0">
                 <a:solidFill>
-                  <a:srgbClr val="9AA5B1"/>
+                  <a:srgbClr val="5A6673"/>
                 </a:solidFill>
                 <a:latin typeface="Segoe UI"/>
               </a:rPr>
@@ -12290,7 +12290,7 @@
             <a:r>
               <a:rPr sz="2000" b="1">
                 <a:solidFill>
-                  <a:srgbClr val="00E5A0"/>
+                  <a:srgbClr val="007A56"/>
                 </a:solidFill>
                 <a:latin typeface="Segoe UI"/>
               </a:rPr>
@@ -12316,11 +12316,11 @@
             </a:avLst>
           </a:prstGeom>
           <a:solidFill>
-            <a:srgbClr val="161C24"/>
+            <a:srgbClr val="F6F8FA"/>
           </a:solidFill>
           <a:ln w="17780">
             <a:solidFill>
-              <a:srgbClr val="38B2AC"/>
+              <a:srgbClr val="0E7490"/>
             </a:solidFill>
           </a:ln>
           <a:effectLst/>
@@ -12373,7 +12373,7 @@
             <a:r>
               <a:rPr sz="1400" b="1">
                 <a:solidFill>
-                  <a:srgbClr val="38B2AC"/>
+                  <a:srgbClr val="0E7490"/>
                 </a:solidFill>
                 <a:latin typeface="Segoe UI"/>
               </a:rPr>
@@ -12408,7 +12408,7 @@
             <a:r>
               <a:rPr sz="1100" b="0">
                 <a:solidFill>
-                  <a:srgbClr val="9AA5B1"/>
+                  <a:srgbClr val="5A6673"/>
                 </a:solidFill>
                 <a:latin typeface="Segoe UI"/>
               </a:rPr>
@@ -12444,7 +12444,7 @@
             <a:r>
               <a:rPr sz="2000" b="1">
                 <a:solidFill>
-                  <a:srgbClr val="00E5A0"/>
+                  <a:srgbClr val="007A56"/>
                 </a:solidFill>
                 <a:latin typeface="Segoe UI"/>
               </a:rPr>
@@ -12470,11 +12470,11 @@
             </a:avLst>
           </a:prstGeom>
           <a:solidFill>
-            <a:srgbClr val="161C24"/>
+            <a:srgbClr val="F6F8FA"/>
           </a:solidFill>
           <a:ln w="17780">
             <a:solidFill>
-              <a:srgbClr val="FFB020"/>
+              <a:srgbClr val="B26B00"/>
             </a:solidFill>
           </a:ln>
           <a:effectLst/>
@@ -12527,7 +12527,7 @@
             <a:r>
               <a:rPr sz="1400" b="1">
                 <a:solidFill>
-                  <a:srgbClr val="FFB020"/>
+                  <a:srgbClr val="B26B00"/>
                 </a:solidFill>
                 <a:latin typeface="Segoe UI"/>
               </a:rPr>
@@ -12562,7 +12562,7 @@
             <a:r>
               <a:rPr sz="1100" b="0">
                 <a:solidFill>
-                  <a:srgbClr val="9AA5B1"/>
+                  <a:srgbClr val="5A6673"/>
                 </a:solidFill>
                 <a:latin typeface="Segoe UI"/>
               </a:rPr>
@@ -12598,7 +12598,7 @@
             <a:r>
               <a:rPr sz="2000" b="1">
                 <a:solidFill>
-                  <a:srgbClr val="00E5A0"/>
+                  <a:srgbClr val="007A56"/>
                 </a:solidFill>
                 <a:latin typeface="Segoe UI"/>
               </a:rPr>
@@ -12624,11 +12624,11 @@
             </a:avLst>
           </a:prstGeom>
           <a:solidFill>
-            <a:srgbClr val="161C24"/>
+            <a:srgbClr val="F6F8FA"/>
           </a:solidFill>
           <a:ln w="17780">
             <a:solidFill>
-              <a:srgbClr val="FF4D6A"/>
+              <a:srgbClr val="C62828"/>
             </a:solidFill>
           </a:ln>
           <a:effectLst/>
@@ -12681,7 +12681,7 @@
             <a:r>
               <a:rPr sz="1400" b="1">
                 <a:solidFill>
-                  <a:srgbClr val="FF4D6A"/>
+                  <a:srgbClr val="C62828"/>
                 </a:solidFill>
                 <a:latin typeface="Segoe UI"/>
               </a:rPr>
@@ -12716,7 +12716,7 @@
             <a:r>
               <a:rPr sz="1100" b="0">
                 <a:solidFill>
-                  <a:srgbClr val="9AA5B1"/>
+                  <a:srgbClr val="5A6673"/>
                 </a:solidFill>
                 <a:latin typeface="Segoe UI"/>
               </a:rPr>
@@ -12752,7 +12752,7 @@
             <a:r>
               <a:rPr sz="2000" b="1">
                 <a:solidFill>
-                  <a:srgbClr val="00E5A0"/>
+                  <a:srgbClr val="007A56"/>
                 </a:solidFill>
                 <a:latin typeface="Segoe UI"/>
               </a:rPr>
@@ -12778,11 +12778,11 @@
             </a:avLst>
           </a:prstGeom>
           <a:solidFill>
-            <a:srgbClr val="161C24"/>
+            <a:srgbClr val="F6F8FA"/>
           </a:solidFill>
           <a:ln w="17780">
             <a:solidFill>
-              <a:srgbClr val="00E5A0"/>
+              <a:srgbClr val="007A56"/>
             </a:solidFill>
           </a:ln>
           <a:effectLst/>
@@ -12835,7 +12835,7 @@
             <a:r>
               <a:rPr sz="1400" b="1">
                 <a:solidFill>
-                  <a:srgbClr val="00E5A0"/>
+                  <a:srgbClr val="007A56"/>
                 </a:solidFill>
                 <a:latin typeface="Segoe UI"/>
               </a:rPr>
@@ -12870,7 +12870,7 @@
             <a:r>
               <a:rPr sz="1100" b="0">
                 <a:solidFill>
-                  <a:srgbClr val="9AA5B1"/>
+                  <a:srgbClr val="5A6673"/>
                 </a:solidFill>
                 <a:latin typeface="Segoe UI"/>
               </a:rPr>
@@ -12897,11 +12897,11 @@
             </a:avLst>
           </a:prstGeom>
           <a:solidFill>
-            <a:srgbClr val="161C24"/>
+            <a:srgbClr val="F6F8FA"/>
           </a:solidFill>
           <a:ln w="12700">
             <a:solidFill>
-              <a:srgbClr val="2A333F"/>
+              <a:srgbClr val="D5DBE1"/>
             </a:solidFill>
           </a:ln>
           <a:effectLst/>
@@ -12954,7 +12954,7 @@
             <a:r>
               <a:rPr sz="1400" b="1">
                 <a:solidFill>
-                  <a:srgbClr val="00E5A0"/>
+                  <a:srgbClr val="007A56"/>
                 </a:solidFill>
                 <a:latin typeface="Consolas"/>
               </a:rPr>
@@ -12989,7 +12989,7 @@
             <a:r>
               <a:rPr sz="1150" b="0">
                 <a:solidFill>
-                  <a:srgbClr val="9AA5B1"/>
+                  <a:srgbClr val="5A6673"/>
                 </a:solidFill>
                 <a:latin typeface="Segoe UI"/>
               </a:rPr>
@@ -13015,11 +13015,11 @@
             </a:avLst>
           </a:prstGeom>
           <a:solidFill>
-            <a:srgbClr val="161C24"/>
+            <a:srgbClr val="F6F8FA"/>
           </a:solidFill>
           <a:ln w="12700">
             <a:solidFill>
-              <a:srgbClr val="2A333F"/>
+              <a:srgbClr val="D5DBE1"/>
             </a:solidFill>
           </a:ln>
           <a:effectLst/>
@@ -13072,7 +13072,7 @@
             <a:r>
               <a:rPr sz="1400" b="1">
                 <a:solidFill>
-                  <a:srgbClr val="00E5A0"/>
+                  <a:srgbClr val="007A56"/>
                 </a:solidFill>
                 <a:latin typeface="Consolas"/>
               </a:rPr>
@@ -13107,7 +13107,7 @@
             <a:r>
               <a:rPr sz="1150" b="0">
                 <a:solidFill>
-                  <a:srgbClr val="9AA5B1"/>
+                  <a:srgbClr val="5A6673"/>
                 </a:solidFill>
                 <a:latin typeface="Segoe UI"/>
               </a:rPr>
@@ -13133,11 +13133,11 @@
             </a:avLst>
           </a:prstGeom>
           <a:solidFill>
-            <a:srgbClr val="161C24"/>
+            <a:srgbClr val="F6F8FA"/>
           </a:solidFill>
           <a:ln w="12700">
             <a:solidFill>
-              <a:srgbClr val="2A333F"/>
+              <a:srgbClr val="D5DBE1"/>
             </a:solidFill>
           </a:ln>
           <a:effectLst/>
@@ -13190,7 +13190,7 @@
             <a:r>
               <a:rPr sz="1400" b="1">
                 <a:solidFill>
-                  <a:srgbClr val="00E5A0"/>
+                  <a:srgbClr val="007A56"/>
                 </a:solidFill>
                 <a:latin typeface="Consolas"/>
               </a:rPr>
@@ -13225,7 +13225,7 @@
             <a:r>
               <a:rPr sz="1150" b="0">
                 <a:solidFill>
-                  <a:srgbClr val="9AA5B1"/>
+                  <a:srgbClr val="5A6673"/>
                 </a:solidFill>
                 <a:latin typeface="Segoe UI"/>
               </a:rPr>
@@ -13251,11 +13251,11 @@
             </a:avLst>
           </a:prstGeom>
           <a:solidFill>
-            <a:srgbClr val="161C24"/>
+            <a:srgbClr val="F6F8FA"/>
           </a:solidFill>
           <a:ln w="12700">
             <a:solidFill>
-              <a:srgbClr val="2A333F"/>
+              <a:srgbClr val="D5DBE1"/>
             </a:solidFill>
           </a:ln>
           <a:effectLst/>
@@ -13308,7 +13308,7 @@
             <a:r>
               <a:rPr sz="1400" b="1">
                 <a:solidFill>
-                  <a:srgbClr val="00E5A0"/>
+                  <a:srgbClr val="007A56"/>
                 </a:solidFill>
                 <a:latin typeface="Consolas"/>
               </a:rPr>
@@ -13343,7 +13343,7 @@
             <a:r>
               <a:rPr sz="1150" b="0">
                 <a:solidFill>
-                  <a:srgbClr val="9AA5B1"/>
+                  <a:srgbClr val="5A6673"/>
                 </a:solidFill>
                 <a:latin typeface="Segoe UI"/>
               </a:rPr>
@@ -13369,11 +13369,11 @@
             </a:avLst>
           </a:prstGeom>
           <a:solidFill>
-            <a:srgbClr val="161C24"/>
+            <a:srgbClr val="F6F8FA"/>
           </a:solidFill>
           <a:ln w="12700">
             <a:solidFill>
-              <a:srgbClr val="2A333F"/>
+              <a:srgbClr val="D5DBE1"/>
             </a:solidFill>
           </a:ln>
           <a:effectLst/>
@@ -13426,7 +13426,7 @@
             <a:r>
               <a:rPr sz="1400" b="1">
                 <a:solidFill>
-                  <a:srgbClr val="00E5A0"/>
+                  <a:srgbClr val="007A56"/>
                 </a:solidFill>
                 <a:latin typeface="Consolas"/>
               </a:rPr>
@@ -13461,7 +13461,7 @@
             <a:r>
               <a:rPr sz="1150" b="0">
                 <a:solidFill>
-                  <a:srgbClr val="9AA5B1"/>
+                  <a:srgbClr val="5A6673"/>
                 </a:solidFill>
                 <a:latin typeface="Segoe UI"/>
               </a:rPr>
@@ -13487,11 +13487,11 @@
             </a:avLst>
           </a:prstGeom>
           <a:solidFill>
-            <a:srgbClr val="161C24"/>
+            <a:srgbClr val="F6F8FA"/>
           </a:solidFill>
           <a:ln w="12700">
             <a:solidFill>
-              <a:srgbClr val="2A333F"/>
+              <a:srgbClr val="D5DBE1"/>
             </a:solidFill>
           </a:ln>
           <a:effectLst/>
@@ -13544,7 +13544,7 @@
             <a:r>
               <a:rPr sz="1400" b="1">
                 <a:solidFill>
-                  <a:srgbClr val="00E5A0"/>
+                  <a:srgbClr val="007A56"/>
                 </a:solidFill>
                 <a:latin typeface="Consolas"/>
               </a:rPr>
@@ -13579,7 +13579,7 @@
             <a:r>
               <a:rPr sz="1150" b="0">
                 <a:solidFill>
-                  <a:srgbClr val="9AA5B1"/>
+                  <a:srgbClr val="5A6673"/>
                 </a:solidFill>
                 <a:latin typeface="Segoe UI"/>
               </a:rPr>
@@ -13614,7 +13614,7 @@
             <a:r>
               <a:rPr sz="1300" b="0">
                 <a:solidFill>
-                  <a:srgbClr val="38B2AC"/>
+                  <a:srgbClr val="0E7490"/>
                 </a:solidFill>
                 <a:latin typeface="Segoe UI"/>
               </a:rPr>
@@ -13649,7 +13649,7 @@
             <a:r>
               <a:rPr sz="1000" b="0">
                 <a:solidFill>
-                  <a:srgbClr val="9AA5B1"/>
+                  <a:srgbClr val="5A6673"/>
                 </a:solidFill>
                 <a:latin typeface="Segoe UI"/>
               </a:rPr>
@@ -13684,7 +13684,7 @@
             <a:r>
               <a:rPr sz="1000" b="0">
                 <a:solidFill>
-                  <a:srgbClr val="9AA5B1"/>
+                  <a:srgbClr val="5A6673"/>
                 </a:solidFill>
                 <a:latin typeface="Segoe UI"/>
               </a:rPr>
@@ -13726,7 +13726,7 @@
             <a:avLst/>
           </a:prstGeom>
           <a:solidFill>
-            <a:srgbClr val="0D1117"/>
+            <a:srgbClr val="FFFFFF"/>
           </a:solidFill>
           <a:ln>
             <a:noFill/>
@@ -13770,7 +13770,7 @@
             <a:avLst/>
           </a:prstGeom>
           <a:solidFill>
-            <a:srgbClr val="00E5A0"/>
+            <a:srgbClr val="007A56"/>
           </a:solidFill>
           <a:ln>
             <a:noFill/>
@@ -13825,7 +13825,7 @@
             <a:r>
               <a:rPr sz="3000" b="1">
                 <a:solidFill>
-                  <a:srgbClr val="F0F3F6"/>
+                  <a:srgbClr val="1F252D"/>
                 </a:solidFill>
                 <a:latin typeface="Segoe UI"/>
               </a:rPr>
@@ -13860,7 +13860,7 @@
             <a:r>
               <a:rPr sz="1400" b="0">
                 <a:solidFill>
-                  <a:srgbClr val="9AA5B1"/>
+                  <a:srgbClr val="5A6673"/>
                 </a:solidFill>
                 <a:latin typeface="Segoe UI"/>
               </a:rPr>
@@ -13884,7 +13884,7 @@
             <a:avLst/>
           </a:prstGeom>
           <a:solidFill>
-            <a:srgbClr val="272F3A"/>
+            <a:srgbClr val="DDE2E7"/>
           </a:solidFill>
           <a:ln>
             <a:noFill/>
@@ -13930,11 +13930,11 @@
             </a:avLst>
           </a:prstGeom>
           <a:solidFill>
-            <a:srgbClr val="161C24"/>
+            <a:srgbClr val="F6F8FA"/>
           </a:solidFill>
           <a:ln w="12700">
             <a:solidFill>
-              <a:srgbClr val="2A333F"/>
+              <a:srgbClr val="D5DBE1"/>
             </a:solidFill>
           </a:ln>
           <a:effectLst/>
@@ -13987,7 +13987,7 @@
             <a:r>
               <a:rPr sz="3400" b="1">
                 <a:solidFill>
-                  <a:srgbClr val="00E5A0"/>
+                  <a:srgbClr val="007A56"/>
                 </a:solidFill>
                 <a:latin typeface="Segoe UI"/>
               </a:rPr>
@@ -14022,7 +14022,7 @@
             <a:r>
               <a:rPr sz="1200" b="0">
                 <a:solidFill>
-                  <a:srgbClr val="9AA5B1"/>
+                  <a:srgbClr val="5A6673"/>
                 </a:solidFill>
                 <a:latin typeface="Segoe UI"/>
               </a:rPr>
@@ -14048,11 +14048,11 @@
             </a:avLst>
           </a:prstGeom>
           <a:solidFill>
-            <a:srgbClr val="161C24"/>
+            <a:srgbClr val="F6F8FA"/>
           </a:solidFill>
           <a:ln w="12700">
             <a:solidFill>
-              <a:srgbClr val="2A333F"/>
+              <a:srgbClr val="D5DBE1"/>
             </a:solidFill>
           </a:ln>
           <a:effectLst/>
@@ -14105,7 +14105,7 @@
             <a:r>
               <a:rPr sz="3400" b="1">
                 <a:solidFill>
-                  <a:srgbClr val="38B2AC"/>
+                  <a:srgbClr val="0E7490"/>
                 </a:solidFill>
                 <a:latin typeface="Segoe UI"/>
               </a:rPr>
@@ -14140,7 +14140,7 @@
             <a:r>
               <a:rPr sz="1200" b="0">
                 <a:solidFill>
-                  <a:srgbClr val="9AA5B1"/>
+                  <a:srgbClr val="5A6673"/>
                 </a:solidFill>
                 <a:latin typeface="Segoe UI"/>
               </a:rPr>
@@ -14166,11 +14166,11 @@
             </a:avLst>
           </a:prstGeom>
           <a:solidFill>
-            <a:srgbClr val="161C24"/>
+            <a:srgbClr val="F6F8FA"/>
           </a:solidFill>
           <a:ln w="12700">
             <a:solidFill>
-              <a:srgbClr val="2A333F"/>
+              <a:srgbClr val="D5DBE1"/>
             </a:solidFill>
           </a:ln>
           <a:effectLst/>
@@ -14223,7 +14223,7 @@
             <a:r>
               <a:rPr sz="3400" b="1">
                 <a:solidFill>
-                  <a:srgbClr val="FFB020"/>
+                  <a:srgbClr val="B26B00"/>
                 </a:solidFill>
                 <a:latin typeface="Segoe UI"/>
               </a:rPr>
@@ -14258,7 +14258,7 @@
             <a:r>
               <a:rPr sz="1200" b="0">
                 <a:solidFill>
-                  <a:srgbClr val="9AA5B1"/>
+                  <a:srgbClr val="5A6673"/>
                 </a:solidFill>
                 <a:latin typeface="Segoe UI"/>
               </a:rPr>
@@ -14284,11 +14284,11 @@
             </a:avLst>
           </a:prstGeom>
           <a:solidFill>
-            <a:srgbClr val="161C24"/>
+            <a:srgbClr val="F6F8FA"/>
           </a:solidFill>
           <a:ln w="12700">
             <a:solidFill>
-              <a:srgbClr val="2A333F"/>
+              <a:srgbClr val="D5DBE1"/>
             </a:solidFill>
           </a:ln>
           <a:effectLst/>
@@ -14341,7 +14341,7 @@
             <a:r>
               <a:rPr sz="3400" b="1">
                 <a:solidFill>
-                  <a:srgbClr val="00E5A0"/>
+                  <a:srgbClr val="007A56"/>
                 </a:solidFill>
                 <a:latin typeface="Segoe UI"/>
               </a:rPr>
@@ -14376,7 +14376,7 @@
             <a:r>
               <a:rPr sz="1200" b="0">
                 <a:solidFill>
-                  <a:srgbClr val="9AA5B1"/>
+                  <a:srgbClr val="5A6673"/>
                 </a:solidFill>
                 <a:latin typeface="Segoe UI"/>
               </a:rPr>
@@ -14402,11 +14402,11 @@
             </a:avLst>
           </a:prstGeom>
           <a:solidFill>
-            <a:srgbClr val="161C24"/>
+            <a:srgbClr val="F6F8FA"/>
           </a:solidFill>
           <a:ln w="12700">
             <a:solidFill>
-              <a:srgbClr val="2A333F"/>
+              <a:srgbClr val="D5DBE1"/>
             </a:solidFill>
           </a:ln>
           <a:effectLst/>
@@ -14459,7 +14459,7 @@
             <a:r>
               <a:rPr sz="3400" b="1">
                 <a:solidFill>
-                  <a:srgbClr val="FF4D6A"/>
+                  <a:srgbClr val="C62828"/>
                 </a:solidFill>
                 <a:latin typeface="Segoe UI"/>
               </a:rPr>
@@ -14494,7 +14494,7 @@
             <a:r>
               <a:rPr sz="1200" b="0">
                 <a:solidFill>
-                  <a:srgbClr val="9AA5B1"/>
+                  <a:srgbClr val="5A6673"/>
                 </a:solidFill>
                 <a:latin typeface="Segoe UI"/>
               </a:rPr>
@@ -14520,11 +14520,11 @@
             </a:avLst>
           </a:prstGeom>
           <a:solidFill>
-            <a:srgbClr val="161C24"/>
+            <a:srgbClr val="F6F8FA"/>
           </a:solidFill>
           <a:ln w="12700">
             <a:solidFill>
-              <a:srgbClr val="2A333F"/>
+              <a:srgbClr val="D5DBE1"/>
             </a:solidFill>
           </a:ln>
           <a:effectLst/>
@@ -14577,7 +14577,7 @@
             <a:r>
               <a:rPr sz="1600" b="1">
                 <a:solidFill>
-                  <a:srgbClr val="00E5A0"/>
+                  <a:srgbClr val="007A56"/>
                 </a:solidFill>
                 <a:latin typeface="Segoe UI"/>
               </a:rPr>
@@ -14619,7 +14619,7 @@
             <a:r>
               <a:rPr sz="1300">
                 <a:solidFill>
-                  <a:srgbClr val="F0F3F6"/>
+                  <a:srgbClr val="1F252D"/>
                 </a:solidFill>
                 <a:latin typeface="Segoe UI"/>
               </a:rPr>
@@ -14638,7 +14638,7 @@
             <a:r>
               <a:rPr sz="1300">
                 <a:solidFill>
-                  <a:srgbClr val="F0F3F6"/>
+                  <a:srgbClr val="1F252D"/>
                 </a:solidFill>
                 <a:latin typeface="Segoe UI"/>
               </a:rPr>
@@ -14657,7 +14657,7 @@
             <a:r>
               <a:rPr sz="1300">
                 <a:solidFill>
-                  <a:srgbClr val="F0F3F6"/>
+                  <a:srgbClr val="1F252D"/>
                 </a:solidFill>
                 <a:latin typeface="Segoe UI"/>
               </a:rPr>
@@ -14676,7 +14676,7 @@
             <a:r>
               <a:rPr sz="1300">
                 <a:solidFill>
-                  <a:srgbClr val="F0F3F6"/>
+                  <a:srgbClr val="1F252D"/>
                 </a:solidFill>
                 <a:latin typeface="Segoe UI"/>
               </a:rPr>
@@ -14695,7 +14695,7 @@
             <a:r>
               <a:rPr sz="1300">
                 <a:solidFill>
-                  <a:srgbClr val="F0F3F6"/>
+                  <a:srgbClr val="1F252D"/>
                 </a:solidFill>
                 <a:latin typeface="Segoe UI"/>
               </a:rPr>
@@ -14721,11 +14721,11 @@
             </a:avLst>
           </a:prstGeom>
           <a:solidFill>
-            <a:srgbClr val="161C24"/>
+            <a:srgbClr val="F6F8FA"/>
           </a:solidFill>
           <a:ln w="12700">
             <a:solidFill>
-              <a:srgbClr val="2A333F"/>
+              <a:srgbClr val="D5DBE1"/>
             </a:solidFill>
           </a:ln>
           <a:effectLst/>
@@ -14778,7 +14778,7 @@
             <a:r>
               <a:rPr sz="1600" b="1">
                 <a:solidFill>
-                  <a:srgbClr val="00E5A0"/>
+                  <a:srgbClr val="007A56"/>
                 </a:solidFill>
                 <a:latin typeface="Segoe UI"/>
               </a:rPr>
@@ -14820,7 +14820,7 @@
             <a:r>
               <a:rPr sz="1300">
                 <a:solidFill>
-                  <a:srgbClr val="F0F3F6"/>
+                  <a:srgbClr val="1F252D"/>
                 </a:solidFill>
                 <a:latin typeface="Segoe UI"/>
               </a:rPr>
@@ -14839,7 +14839,7 @@
             <a:r>
               <a:rPr sz="1300">
                 <a:solidFill>
-                  <a:srgbClr val="F0F3F6"/>
+                  <a:srgbClr val="1F252D"/>
                 </a:solidFill>
                 <a:latin typeface="Segoe UI"/>
               </a:rPr>
@@ -14858,7 +14858,7 @@
             <a:r>
               <a:rPr sz="1300">
                 <a:solidFill>
-                  <a:srgbClr val="F0F3F6"/>
+                  <a:srgbClr val="1F252D"/>
                 </a:solidFill>
                 <a:latin typeface="Segoe UI"/>
               </a:rPr>
@@ -14877,7 +14877,7 @@
             <a:r>
               <a:rPr sz="1300">
                 <a:solidFill>
-                  <a:srgbClr val="F0F3F6"/>
+                  <a:srgbClr val="1F252D"/>
                 </a:solidFill>
                 <a:latin typeface="Segoe UI"/>
               </a:rPr>
@@ -14896,7 +14896,7 @@
             <a:r>
               <a:rPr sz="1300">
                 <a:solidFill>
-                  <a:srgbClr val="F0F3F6"/>
+                  <a:srgbClr val="1F252D"/>
                 </a:solidFill>
                 <a:latin typeface="Segoe UI"/>
               </a:rPr>
@@ -14931,7 +14931,7 @@
             <a:r>
               <a:rPr sz="1000" b="0">
                 <a:solidFill>
-                  <a:srgbClr val="9AA5B1"/>
+                  <a:srgbClr val="5A6673"/>
                 </a:solidFill>
                 <a:latin typeface="Segoe UI"/>
               </a:rPr>
@@ -14966,7 +14966,7 @@
             <a:r>
               <a:rPr sz="1000" b="0">
                 <a:solidFill>
-                  <a:srgbClr val="9AA5B1"/>
+                  <a:srgbClr val="5A6673"/>
                 </a:solidFill>
                 <a:latin typeface="Segoe UI"/>
               </a:rPr>
@@ -15008,7 +15008,7 @@
             <a:avLst/>
           </a:prstGeom>
           <a:solidFill>
-            <a:srgbClr val="0D1117"/>
+            <a:srgbClr val="FFFFFF"/>
           </a:solidFill>
           <a:ln>
             <a:noFill/>
@@ -15052,7 +15052,7 @@
             <a:avLst/>
           </a:prstGeom>
           <a:solidFill>
-            <a:srgbClr val="00E5A0"/>
+            <a:srgbClr val="007A56"/>
           </a:solidFill>
           <a:ln>
             <a:noFill/>
@@ -15107,7 +15107,7 @@
             <a:r>
               <a:rPr sz="3000" b="1">
                 <a:solidFill>
-                  <a:srgbClr val="F0F3F6"/>
+                  <a:srgbClr val="1F252D"/>
                 </a:solidFill>
                 <a:latin typeface="Segoe UI"/>
               </a:rPr>
@@ -15142,7 +15142,7 @@
             <a:r>
               <a:rPr sz="1400" b="0">
                 <a:solidFill>
-                  <a:srgbClr val="9AA5B1"/>
+                  <a:srgbClr val="5A6673"/>
                 </a:solidFill>
                 <a:latin typeface="Segoe UI"/>
               </a:rPr>
@@ -15166,7 +15166,7 @@
             <a:avLst/>
           </a:prstGeom>
           <a:solidFill>
-            <a:srgbClr val="272F3A"/>
+            <a:srgbClr val="DDE2E7"/>
           </a:solidFill>
           <a:ln>
             <a:noFill/>
@@ -15212,11 +15212,11 @@
             </a:avLst>
           </a:prstGeom>
           <a:solidFill>
-            <a:srgbClr val="161C24"/>
+            <a:srgbClr val="F6F8FA"/>
           </a:solidFill>
           <a:ln w="12700">
             <a:solidFill>
-              <a:srgbClr val="2A333F"/>
+              <a:srgbClr val="D5DBE1"/>
             </a:solidFill>
           </a:ln>
           <a:effectLst/>
@@ -15258,7 +15258,7 @@
             <a:avLst/>
           </a:prstGeom>
           <a:solidFill>
-            <a:srgbClr val="00E5A0"/>
+            <a:srgbClr val="007A56"/>
           </a:solidFill>
           <a:ln>
             <a:noFill/>
@@ -15287,7 +15287,7 @@
             <a:r>
               <a:rPr sz="1800" b="1">
                 <a:solidFill>
-                  <a:srgbClr val="0D1117"/>
+                  <a:srgbClr val="FFFFFF"/>
                 </a:solidFill>
                 <a:latin typeface="Segoe UI"/>
               </a:rPr>
@@ -15322,7 +15322,7 @@
             <a:r>
               <a:rPr sz="1400" b="1">
                 <a:solidFill>
-                  <a:srgbClr val="F0F3F6"/>
+                  <a:srgbClr val="1F252D"/>
                 </a:solidFill>
                 <a:latin typeface="Segoe UI"/>
               </a:rPr>
@@ -15357,7 +15357,7 @@
             <a:r>
               <a:rPr sz="1100" b="0">
                 <a:solidFill>
-                  <a:srgbClr val="9AA5B1"/>
+                  <a:srgbClr val="5A6673"/>
                 </a:solidFill>
                 <a:latin typeface="Segoe UI"/>
               </a:rPr>
@@ -15392,7 +15392,7 @@
             <a:r>
               <a:rPr sz="1800" b="1">
                 <a:solidFill>
-                  <a:srgbClr val="38B2AC"/>
+                  <a:srgbClr val="0E7490"/>
                 </a:solidFill>
                 <a:latin typeface="Segoe UI"/>
               </a:rPr>
@@ -15418,11 +15418,11 @@
             </a:avLst>
           </a:prstGeom>
           <a:solidFill>
-            <a:srgbClr val="161C24"/>
+            <a:srgbClr val="F6F8FA"/>
           </a:solidFill>
           <a:ln w="12700">
             <a:solidFill>
-              <a:srgbClr val="2A333F"/>
+              <a:srgbClr val="D5DBE1"/>
             </a:solidFill>
           </a:ln>
           <a:effectLst/>
@@ -15464,7 +15464,7 @@
             <a:avLst/>
           </a:prstGeom>
           <a:solidFill>
-            <a:srgbClr val="00E5A0"/>
+            <a:srgbClr val="007A56"/>
           </a:solidFill>
           <a:ln>
             <a:noFill/>
@@ -15493,7 +15493,7 @@
             <a:r>
               <a:rPr sz="1800" b="1">
                 <a:solidFill>
-                  <a:srgbClr val="0D1117"/>
+                  <a:srgbClr val="FFFFFF"/>
                 </a:solidFill>
                 <a:latin typeface="Segoe UI"/>
               </a:rPr>
@@ -15528,7 +15528,7 @@
             <a:r>
               <a:rPr sz="1400" b="1">
                 <a:solidFill>
-                  <a:srgbClr val="F0F3F6"/>
+                  <a:srgbClr val="1F252D"/>
                 </a:solidFill>
                 <a:latin typeface="Segoe UI"/>
               </a:rPr>
@@ -15563,7 +15563,7 @@
             <a:r>
               <a:rPr sz="1100" b="0">
                 <a:solidFill>
-                  <a:srgbClr val="9AA5B1"/>
+                  <a:srgbClr val="5A6673"/>
                 </a:solidFill>
                 <a:latin typeface="Segoe UI"/>
               </a:rPr>
@@ -15598,7 +15598,7 @@
             <a:r>
               <a:rPr sz="1800" b="1">
                 <a:solidFill>
-                  <a:srgbClr val="38B2AC"/>
+                  <a:srgbClr val="0E7490"/>
                 </a:solidFill>
                 <a:latin typeface="Segoe UI"/>
               </a:rPr>
@@ -15624,11 +15624,11 @@
             </a:avLst>
           </a:prstGeom>
           <a:solidFill>
-            <a:srgbClr val="161C24"/>
+            <a:srgbClr val="F6F8FA"/>
           </a:solidFill>
           <a:ln w="12700">
             <a:solidFill>
-              <a:srgbClr val="2A333F"/>
+              <a:srgbClr val="D5DBE1"/>
             </a:solidFill>
           </a:ln>
           <a:effectLst/>
@@ -15670,7 +15670,7 @@
             <a:avLst/>
           </a:prstGeom>
           <a:solidFill>
-            <a:srgbClr val="00E5A0"/>
+            <a:srgbClr val="007A56"/>
           </a:solidFill>
           <a:ln>
             <a:noFill/>
@@ -15699,7 +15699,7 @@
             <a:r>
               <a:rPr sz="1800" b="1">
                 <a:solidFill>
-                  <a:srgbClr val="0D1117"/>
+                  <a:srgbClr val="FFFFFF"/>
                 </a:solidFill>
                 <a:latin typeface="Segoe UI"/>
               </a:rPr>
@@ -15734,7 +15734,7 @@
             <a:r>
               <a:rPr sz="1400" b="1">
                 <a:solidFill>
-                  <a:srgbClr val="F0F3F6"/>
+                  <a:srgbClr val="1F252D"/>
                 </a:solidFill>
                 <a:latin typeface="Segoe UI"/>
               </a:rPr>
@@ -15769,7 +15769,7 @@
             <a:r>
               <a:rPr sz="1100" b="0">
                 <a:solidFill>
-                  <a:srgbClr val="9AA5B1"/>
+                  <a:srgbClr val="5A6673"/>
                 </a:solidFill>
                 <a:latin typeface="Segoe UI"/>
               </a:rPr>
@@ -15804,7 +15804,7 @@
             <a:r>
               <a:rPr sz="1800" b="1">
                 <a:solidFill>
-                  <a:srgbClr val="38B2AC"/>
+                  <a:srgbClr val="0E7490"/>
                 </a:solidFill>
                 <a:latin typeface="Segoe UI"/>
               </a:rPr>
@@ -15830,11 +15830,11 @@
             </a:avLst>
           </a:prstGeom>
           <a:solidFill>
-            <a:srgbClr val="161C24"/>
+            <a:srgbClr val="F6F8FA"/>
           </a:solidFill>
           <a:ln w="12700">
             <a:solidFill>
-              <a:srgbClr val="2A333F"/>
+              <a:srgbClr val="D5DBE1"/>
             </a:solidFill>
           </a:ln>
           <a:effectLst/>
@@ -15876,7 +15876,7 @@
             <a:avLst/>
           </a:prstGeom>
           <a:solidFill>
-            <a:srgbClr val="00E5A0"/>
+            <a:srgbClr val="007A56"/>
           </a:solidFill>
           <a:ln>
             <a:noFill/>
@@ -15905,7 +15905,7 @@
             <a:r>
               <a:rPr sz="1800" b="1">
                 <a:solidFill>
-                  <a:srgbClr val="0D1117"/>
+                  <a:srgbClr val="FFFFFF"/>
                 </a:solidFill>
                 <a:latin typeface="Segoe UI"/>
               </a:rPr>
@@ -15940,7 +15940,7 @@
             <a:r>
               <a:rPr sz="1400" b="1">
                 <a:solidFill>
-                  <a:srgbClr val="F0F3F6"/>
+                  <a:srgbClr val="1F252D"/>
                 </a:solidFill>
                 <a:latin typeface="Segoe UI"/>
               </a:rPr>
@@ -15975,7 +15975,7 @@
             <a:r>
               <a:rPr sz="1100" b="0">
                 <a:solidFill>
-                  <a:srgbClr val="9AA5B1"/>
+                  <a:srgbClr val="5A6673"/>
                 </a:solidFill>
                 <a:latin typeface="Segoe UI"/>
               </a:rPr>
@@ -16010,7 +16010,7 @@
             <a:r>
               <a:rPr sz="1800" b="1">
                 <a:solidFill>
-                  <a:srgbClr val="38B2AC"/>
+                  <a:srgbClr val="0E7490"/>
                 </a:solidFill>
                 <a:latin typeface="Segoe UI"/>
               </a:rPr>
@@ -16036,11 +16036,11 @@
             </a:avLst>
           </a:prstGeom>
           <a:solidFill>
-            <a:srgbClr val="161C24"/>
+            <a:srgbClr val="F6F8FA"/>
           </a:solidFill>
           <a:ln w="12700">
             <a:solidFill>
-              <a:srgbClr val="2A333F"/>
+              <a:srgbClr val="D5DBE1"/>
             </a:solidFill>
           </a:ln>
           <a:effectLst/>
@@ -16082,7 +16082,7 @@
             <a:avLst/>
           </a:prstGeom>
           <a:solidFill>
-            <a:srgbClr val="00E5A0"/>
+            <a:srgbClr val="007A56"/>
           </a:solidFill>
           <a:ln>
             <a:noFill/>
@@ -16111,7 +16111,7 @@
             <a:r>
               <a:rPr sz="1800" b="1">
                 <a:solidFill>
-                  <a:srgbClr val="0D1117"/>
+                  <a:srgbClr val="FFFFFF"/>
                 </a:solidFill>
                 <a:latin typeface="Segoe UI"/>
               </a:rPr>
@@ -16146,7 +16146,7 @@
             <a:r>
               <a:rPr sz="1400" b="1">
                 <a:solidFill>
-                  <a:srgbClr val="F0F3F6"/>
+                  <a:srgbClr val="1F252D"/>
                 </a:solidFill>
                 <a:latin typeface="Segoe UI"/>
               </a:rPr>
@@ -16181,7 +16181,7 @@
             <a:r>
               <a:rPr sz="1100" b="0">
                 <a:solidFill>
-                  <a:srgbClr val="9AA5B1"/>
+                  <a:srgbClr val="5A6673"/>
                 </a:solidFill>
                 <a:latin typeface="Segoe UI"/>
               </a:rPr>
@@ -16207,11 +16207,11 @@
             </a:avLst>
           </a:prstGeom>
           <a:solidFill>
-            <a:srgbClr val="161C24"/>
+            <a:srgbClr val="F6F8FA"/>
           </a:solidFill>
           <a:ln w="12700">
             <a:solidFill>
-              <a:srgbClr val="2A333F"/>
+              <a:srgbClr val="D5DBE1"/>
             </a:solidFill>
           </a:ln>
           <a:effectLst/>
@@ -16264,7 +16264,7 @@
             <a:r>
               <a:rPr sz="1600" b="1">
                 <a:solidFill>
-                  <a:srgbClr val="00E5A0"/>
+                  <a:srgbClr val="007A56"/>
                 </a:solidFill>
                 <a:latin typeface="Segoe UI"/>
               </a:rPr>
@@ -16306,7 +16306,7 @@
             <a:r>
               <a:rPr sz="1300">
                 <a:solidFill>
-                  <a:srgbClr val="F0F3F6"/>
+                  <a:srgbClr val="1F252D"/>
                 </a:solidFill>
                 <a:latin typeface="Segoe UI"/>
               </a:rPr>
@@ -16325,7 +16325,7 @@
             <a:r>
               <a:rPr sz="1300">
                 <a:solidFill>
-                  <a:srgbClr val="F0F3F6"/>
+                  <a:srgbClr val="1F252D"/>
                 </a:solidFill>
                 <a:latin typeface="Segoe UI"/>
               </a:rPr>
@@ -16344,7 +16344,7 @@
             <a:r>
               <a:rPr sz="1300">
                 <a:solidFill>
-                  <a:srgbClr val="F0F3F6"/>
+                  <a:srgbClr val="1F252D"/>
                 </a:solidFill>
                 <a:latin typeface="Segoe UI"/>
               </a:rPr>
@@ -16363,7 +16363,7 @@
             <a:r>
               <a:rPr sz="1300">
                 <a:solidFill>
-                  <a:srgbClr val="F0F3F6"/>
+                  <a:srgbClr val="1F252D"/>
                 </a:solidFill>
                 <a:latin typeface="Segoe UI"/>
               </a:rPr>
@@ -16389,11 +16389,11 @@
             </a:avLst>
           </a:prstGeom>
           <a:solidFill>
-            <a:srgbClr val="161C24"/>
+            <a:srgbClr val="F6F8FA"/>
           </a:solidFill>
           <a:ln w="12700">
             <a:solidFill>
-              <a:srgbClr val="2A333F"/>
+              <a:srgbClr val="D5DBE1"/>
             </a:solidFill>
           </a:ln>
           <a:effectLst/>
@@ -16446,7 +16446,7 @@
             <a:r>
               <a:rPr sz="1600" b="1">
                 <a:solidFill>
-                  <a:srgbClr val="38B2AC"/>
+                  <a:srgbClr val="0E7490"/>
                 </a:solidFill>
                 <a:latin typeface="Segoe UI"/>
               </a:rPr>
@@ -16488,7 +16488,7 @@
             <a:r>
               <a:rPr sz="1300">
                 <a:solidFill>
-                  <a:srgbClr val="F0F3F6"/>
+                  <a:srgbClr val="1F252D"/>
                 </a:solidFill>
                 <a:latin typeface="Segoe UI"/>
               </a:rPr>
@@ -16507,7 +16507,7 @@
             <a:r>
               <a:rPr sz="1300">
                 <a:solidFill>
-                  <a:srgbClr val="F0F3F6"/>
+                  <a:srgbClr val="1F252D"/>
                 </a:solidFill>
                 <a:latin typeface="Segoe UI"/>
               </a:rPr>
@@ -16526,7 +16526,7 @@
             <a:r>
               <a:rPr sz="1300">
                 <a:solidFill>
-                  <a:srgbClr val="F0F3F6"/>
+                  <a:srgbClr val="1F252D"/>
                 </a:solidFill>
                 <a:latin typeface="Segoe UI"/>
               </a:rPr>
@@ -16545,7 +16545,7 @@
             <a:r>
               <a:rPr sz="1300">
                 <a:solidFill>
-                  <a:srgbClr val="F0F3F6"/>
+                  <a:srgbClr val="1F252D"/>
                 </a:solidFill>
                 <a:latin typeface="Segoe UI"/>
               </a:rPr>
@@ -16580,7 +16580,7 @@
             <a:r>
               <a:rPr sz="1000" b="0">
                 <a:solidFill>
-                  <a:srgbClr val="9AA5B1"/>
+                  <a:srgbClr val="5A6673"/>
                 </a:solidFill>
                 <a:latin typeface="Segoe UI"/>
               </a:rPr>
@@ -16615,7 +16615,7 @@
             <a:r>
               <a:rPr sz="1000" b="0">
                 <a:solidFill>
-                  <a:srgbClr val="9AA5B1"/>
+                  <a:srgbClr val="5A6673"/>
                 </a:solidFill>
                 <a:latin typeface="Segoe UI"/>
               </a:rPr>
@@ -16657,7 +16657,7 @@
             <a:avLst/>
           </a:prstGeom>
           <a:solidFill>
-            <a:srgbClr val="0D1117"/>
+            <a:srgbClr val="FFFFFF"/>
           </a:solidFill>
           <a:ln>
             <a:noFill/>
@@ -16701,7 +16701,7 @@
             <a:avLst/>
           </a:prstGeom>
           <a:solidFill>
-            <a:srgbClr val="00E5A0"/>
+            <a:srgbClr val="007A56"/>
           </a:solidFill>
           <a:ln>
             <a:noFill/>
@@ -16756,7 +16756,7 @@
             <a:r>
               <a:rPr sz="3000" b="1">
                 <a:solidFill>
-                  <a:srgbClr val="F0F3F6"/>
+                  <a:srgbClr val="1F252D"/>
                 </a:solidFill>
                 <a:latin typeface="Segoe UI"/>
               </a:rPr>
@@ -16791,7 +16791,7 @@
             <a:r>
               <a:rPr sz="1400" b="0">
                 <a:solidFill>
-                  <a:srgbClr val="9AA5B1"/>
+                  <a:srgbClr val="5A6673"/>
                 </a:solidFill>
                 <a:latin typeface="Segoe UI"/>
               </a:rPr>
@@ -16815,7 +16815,7 @@
             <a:avLst/>
           </a:prstGeom>
           <a:solidFill>
-            <a:srgbClr val="272F3A"/>
+            <a:srgbClr val="DDE2E7"/>
           </a:solidFill>
           <a:ln>
             <a:noFill/>
@@ -16861,11 +16861,11 @@
             </a:avLst>
           </a:prstGeom>
           <a:solidFill>
-            <a:srgbClr val="161C24"/>
+            <a:srgbClr val="F6F8FA"/>
           </a:solidFill>
           <a:ln w="12700">
             <a:solidFill>
-              <a:srgbClr val="2A333F"/>
+              <a:srgbClr val="D5DBE1"/>
             </a:solidFill>
           </a:ln>
           <a:effectLst/>
@@ -16918,7 +16918,7 @@
             <a:r>
               <a:rPr sz="1600" b="1">
                 <a:solidFill>
-                  <a:srgbClr val="00E5A0"/>
+                  <a:srgbClr val="007A56"/>
                 </a:solidFill>
                 <a:latin typeface="Segoe UI"/>
               </a:rPr>
@@ -16960,7 +16960,7 @@
             <a:r>
               <a:rPr sz="1350" b="1">
                 <a:solidFill>
-                  <a:srgbClr val="00E5A0"/>
+                  <a:srgbClr val="007A56"/>
                 </a:solidFill>
                 <a:latin typeface="Segoe UI"/>
               </a:rPr>
@@ -16969,7 +16969,7 @@
             <a:r>
               <a:rPr sz="1350">
                 <a:solidFill>
-                  <a:srgbClr val="F0F3F6"/>
+                  <a:srgbClr val="1F252D"/>
                 </a:solidFill>
                 <a:latin typeface="Segoe UI"/>
               </a:rPr>
@@ -16988,7 +16988,7 @@
             <a:r>
               <a:rPr sz="1350" b="1">
                 <a:solidFill>
-                  <a:srgbClr val="00E5A0"/>
+                  <a:srgbClr val="007A56"/>
                 </a:solidFill>
                 <a:latin typeface="Segoe UI"/>
               </a:rPr>
@@ -16997,7 +16997,7 @@
             <a:r>
               <a:rPr sz="1350">
                 <a:solidFill>
-                  <a:srgbClr val="F0F3F6"/>
+                  <a:srgbClr val="1F252D"/>
                 </a:solidFill>
                 <a:latin typeface="Segoe UI"/>
               </a:rPr>
@@ -17016,7 +17016,7 @@
             <a:r>
               <a:rPr sz="1350" b="1">
                 <a:solidFill>
-                  <a:srgbClr val="00E5A0"/>
+                  <a:srgbClr val="007A56"/>
                 </a:solidFill>
                 <a:latin typeface="Segoe UI"/>
               </a:rPr>
@@ -17025,7 +17025,7 @@
             <a:r>
               <a:rPr sz="1350">
                 <a:solidFill>
-                  <a:srgbClr val="F0F3F6"/>
+                  <a:srgbClr val="1F252D"/>
                 </a:solidFill>
                 <a:latin typeface="Segoe UI"/>
               </a:rPr>
@@ -17044,7 +17044,7 @@
             <a:r>
               <a:rPr sz="1350" b="1">
                 <a:solidFill>
-                  <a:srgbClr val="00E5A0"/>
+                  <a:srgbClr val="007A56"/>
                 </a:solidFill>
                 <a:latin typeface="Segoe UI"/>
               </a:rPr>
@@ -17053,7 +17053,7 @@
             <a:r>
               <a:rPr sz="1350">
                 <a:solidFill>
-                  <a:srgbClr val="F0F3F6"/>
+                  <a:srgbClr val="1F252D"/>
                 </a:solidFill>
                 <a:latin typeface="Segoe UI"/>
               </a:rPr>
@@ -17072,7 +17072,7 @@
             <a:r>
               <a:rPr sz="1350" b="1">
                 <a:solidFill>
-                  <a:srgbClr val="00E5A0"/>
+                  <a:srgbClr val="007A56"/>
                 </a:solidFill>
                 <a:latin typeface="Segoe UI"/>
               </a:rPr>
@@ -17081,7 +17081,7 @@
             <a:r>
               <a:rPr sz="1350">
                 <a:solidFill>
-                  <a:srgbClr val="F0F3F6"/>
+                  <a:srgbClr val="1F252D"/>
                 </a:solidFill>
                 <a:latin typeface="Segoe UI"/>
               </a:rPr>
@@ -17107,11 +17107,11 @@
             </a:avLst>
           </a:prstGeom>
           <a:solidFill>
-            <a:srgbClr val="161C24"/>
+            <a:srgbClr val="F6F8FA"/>
           </a:solidFill>
           <a:ln w="12700">
             <a:solidFill>
-              <a:srgbClr val="2A333F"/>
+              <a:srgbClr val="D5DBE1"/>
             </a:solidFill>
           </a:ln>
           <a:effectLst/>
@@ -17164,7 +17164,7 @@
             <a:r>
               <a:rPr sz="1600" b="1">
                 <a:solidFill>
-                  <a:srgbClr val="38B2AC"/>
+                  <a:srgbClr val="0E7490"/>
                 </a:solidFill>
                 <a:latin typeface="Segoe UI"/>
               </a:rPr>
@@ -17206,7 +17206,7 @@
             <a:r>
               <a:rPr sz="1350">
                 <a:solidFill>
-                  <a:srgbClr val="F0F3F6"/>
+                  <a:srgbClr val="1F252D"/>
                 </a:solidFill>
                 <a:latin typeface="Segoe UI"/>
               </a:rPr>
@@ -17225,7 +17225,7 @@
             <a:r>
               <a:rPr sz="1350">
                 <a:solidFill>
-                  <a:srgbClr val="F0F3F6"/>
+                  <a:srgbClr val="1F252D"/>
                 </a:solidFill>
                 <a:latin typeface="Segoe UI"/>
               </a:rPr>
@@ -17244,7 +17244,7 @@
             <a:r>
               <a:rPr sz="1350">
                 <a:solidFill>
-                  <a:srgbClr val="F0F3F6"/>
+                  <a:srgbClr val="1F252D"/>
                 </a:solidFill>
                 <a:latin typeface="Segoe UI"/>
               </a:rPr>
@@ -17263,7 +17263,7 @@
             <a:r>
               <a:rPr sz="1350">
                 <a:solidFill>
-                  <a:srgbClr val="F0F3F6"/>
+                  <a:srgbClr val="1F252D"/>
                 </a:solidFill>
                 <a:latin typeface="Segoe UI"/>
               </a:rPr>
@@ -17282,7 +17282,7 @@
             <a:r>
               <a:rPr sz="1350">
                 <a:solidFill>
-                  <a:srgbClr val="F0F3F6"/>
+                  <a:srgbClr val="1F252D"/>
                 </a:solidFill>
                 <a:latin typeface="Segoe UI"/>
               </a:rPr>
@@ -17301,7 +17301,7 @@
             <a:r>
               <a:rPr sz="1350">
                 <a:solidFill>
-                  <a:srgbClr val="F0F3F6"/>
+                  <a:srgbClr val="1F252D"/>
                 </a:solidFill>
                 <a:latin typeface="Segoe UI"/>
               </a:rPr>
@@ -17336,7 +17336,7 @@
             <a:r>
               <a:rPr sz="1000" b="0">
                 <a:solidFill>
-                  <a:srgbClr val="9AA5B1"/>
+                  <a:srgbClr val="5A6673"/>
                 </a:solidFill>
                 <a:latin typeface="Segoe UI"/>
               </a:rPr>
@@ -17371,7 +17371,7 @@
             <a:r>
               <a:rPr sz="1000" b="0">
                 <a:solidFill>
-                  <a:srgbClr val="9AA5B1"/>
+                  <a:srgbClr val="5A6673"/>
                 </a:solidFill>
                 <a:latin typeface="Segoe UI"/>
               </a:rPr>
@@ -17413,7 +17413,7 @@
             <a:avLst/>
           </a:prstGeom>
           <a:solidFill>
-            <a:srgbClr val="0D1117"/>
+            <a:srgbClr val="FFFFFF"/>
           </a:solidFill>
           <a:ln>
             <a:noFill/>
@@ -17468,7 +17468,7 @@
             <a:r>
               <a:rPr sz="5400" b="1">
                 <a:solidFill>
-                  <a:srgbClr val="00E5A0"/>
+                  <a:srgbClr val="007A56"/>
                 </a:solidFill>
                 <a:latin typeface="Segoe UI"/>
               </a:rPr>
@@ -17503,7 +17503,7 @@
             <a:r>
               <a:rPr sz="2000" b="0">
                 <a:solidFill>
-                  <a:srgbClr val="F0F3F6"/>
+                  <a:srgbClr val="1F252D"/>
                 </a:solidFill>
                 <a:latin typeface="Segoe UI"/>
               </a:rPr>
@@ -17527,11 +17527,11 @@
             <a:avLst/>
           </a:prstGeom>
           <a:solidFill>
-            <a:srgbClr val="1D242E"/>
+            <a:srgbClr val="EDF1F5"/>
           </a:solidFill>
           <a:ln w="12700">
             <a:solidFill>
-              <a:srgbClr val="38B2AC"/>
+              <a:srgbClr val="0E7490"/>
             </a:solidFill>
           </a:ln>
           <a:effectLst/>
@@ -17558,7 +17558,7 @@
             <a:r>
               <a:rPr sz="1200" b="1">
                 <a:solidFill>
-                  <a:srgbClr val="38B2AC"/>
+                  <a:srgbClr val="0E7490"/>
                 </a:solidFill>
                 <a:latin typeface="Segoe UI"/>
               </a:rPr>
@@ -17582,11 +17582,11 @@
             <a:avLst/>
           </a:prstGeom>
           <a:solidFill>
-            <a:srgbClr val="1D242E"/>
+            <a:srgbClr val="EDF1F5"/>
           </a:solidFill>
           <a:ln w="12700">
             <a:solidFill>
-              <a:srgbClr val="38B2AC"/>
+              <a:srgbClr val="0E7490"/>
             </a:solidFill>
           </a:ln>
           <a:effectLst/>
@@ -17613,7 +17613,7 @@
             <a:r>
               <a:rPr sz="1200" b="1">
                 <a:solidFill>
-                  <a:srgbClr val="38B2AC"/>
+                  <a:srgbClr val="0E7490"/>
                 </a:solidFill>
                 <a:latin typeface="Segoe UI"/>
               </a:rPr>
@@ -17637,11 +17637,11 @@
             <a:avLst/>
           </a:prstGeom>
           <a:solidFill>
-            <a:srgbClr val="1D242E"/>
+            <a:srgbClr val="EDF1F5"/>
           </a:solidFill>
           <a:ln w="12700">
             <a:solidFill>
-              <a:srgbClr val="38B2AC"/>
+              <a:srgbClr val="0E7490"/>
             </a:solidFill>
           </a:ln>
           <a:effectLst/>
@@ -17668,7 +17668,7 @@
             <a:r>
               <a:rPr sz="1200" b="1">
                 <a:solidFill>
-                  <a:srgbClr val="38B2AC"/>
+                  <a:srgbClr val="0E7490"/>
                 </a:solidFill>
                 <a:latin typeface="Segoe UI"/>
               </a:rPr>
@@ -17692,11 +17692,11 @@
             <a:avLst/>
           </a:prstGeom>
           <a:solidFill>
-            <a:srgbClr val="1D242E"/>
+            <a:srgbClr val="EDF1F5"/>
           </a:solidFill>
           <a:ln w="12700">
             <a:solidFill>
-              <a:srgbClr val="38B2AC"/>
+              <a:srgbClr val="0E7490"/>
             </a:solidFill>
           </a:ln>
           <a:effectLst/>
@@ -17723,7 +17723,7 @@
             <a:r>
               <a:rPr sz="1200" b="1">
                 <a:solidFill>
-                  <a:srgbClr val="38B2AC"/>
+                  <a:srgbClr val="0E7490"/>
                 </a:solidFill>
                 <a:latin typeface="Segoe UI"/>
               </a:rPr>
@@ -17765,7 +17765,7 @@
             <a:avLst/>
           </a:prstGeom>
           <a:solidFill>
-            <a:srgbClr val="0D1117"/>
+            <a:srgbClr val="FFFFFF"/>
           </a:solidFill>
           <a:ln>
             <a:noFill/>
@@ -17809,7 +17809,7 @@
             <a:avLst/>
           </a:prstGeom>
           <a:solidFill>
-            <a:srgbClr val="00E5A0"/>
+            <a:srgbClr val="007A56"/>
           </a:solidFill>
           <a:ln>
             <a:noFill/>
@@ -17864,7 +17864,7 @@
             <a:r>
               <a:rPr sz="3000" b="1">
                 <a:solidFill>
-                  <a:srgbClr val="F0F3F6"/>
+                  <a:srgbClr val="1F252D"/>
                 </a:solidFill>
                 <a:latin typeface="Segoe UI"/>
               </a:rPr>
@@ -17899,7 +17899,7 @@
             <a:r>
               <a:rPr sz="1400" b="0">
                 <a:solidFill>
-                  <a:srgbClr val="9AA5B1"/>
+                  <a:srgbClr val="5A6673"/>
                 </a:solidFill>
                 <a:latin typeface="Segoe UI"/>
               </a:rPr>
@@ -17923,7 +17923,7 @@
             <a:avLst/>
           </a:prstGeom>
           <a:solidFill>
-            <a:srgbClr val="272F3A"/>
+            <a:srgbClr val="DDE2E7"/>
           </a:solidFill>
           <a:ln>
             <a:noFill/>
@@ -17969,11 +17969,11 @@
             </a:avLst>
           </a:prstGeom>
           <a:solidFill>
-            <a:srgbClr val="161C24"/>
+            <a:srgbClr val="F6F8FA"/>
           </a:solidFill>
           <a:ln w="12700">
             <a:solidFill>
-              <a:srgbClr val="2A333F"/>
+              <a:srgbClr val="D5DBE1"/>
             </a:solidFill>
           </a:ln>
           <a:effectLst/>
@@ -18026,7 +18026,7 @@
             <a:r>
               <a:rPr sz="1600" b="1">
                 <a:solidFill>
-                  <a:srgbClr val="FF4D6A"/>
+                  <a:srgbClr val="C62828"/>
                 </a:solidFill>
                 <a:latin typeface="Segoe UI"/>
               </a:rPr>
@@ -18068,7 +18068,7 @@
             <a:r>
               <a:rPr sz="1300">
                 <a:solidFill>
-                  <a:srgbClr val="F0F3F6"/>
+                  <a:srgbClr val="1F252D"/>
                 </a:solidFill>
                 <a:latin typeface="Segoe UI"/>
               </a:rPr>
@@ -18087,7 +18087,7 @@
             <a:r>
               <a:rPr sz="1300">
                 <a:solidFill>
-                  <a:srgbClr val="F0F3F6"/>
+                  <a:srgbClr val="1F252D"/>
                 </a:solidFill>
                 <a:latin typeface="Segoe UI"/>
               </a:rPr>
@@ -18106,7 +18106,7 @@
             <a:r>
               <a:rPr sz="1300">
                 <a:solidFill>
-                  <a:srgbClr val="F0F3F6"/>
+                  <a:srgbClr val="1F252D"/>
                 </a:solidFill>
                 <a:latin typeface="Segoe UI"/>
               </a:rPr>
@@ -18132,11 +18132,11 @@
             </a:avLst>
           </a:prstGeom>
           <a:solidFill>
-            <a:srgbClr val="161C24"/>
+            <a:srgbClr val="F6F8FA"/>
           </a:solidFill>
           <a:ln w="12700">
             <a:solidFill>
-              <a:srgbClr val="2A333F"/>
+              <a:srgbClr val="D5DBE1"/>
             </a:solidFill>
           </a:ln>
           <a:effectLst/>
@@ -18189,7 +18189,7 @@
             <a:r>
               <a:rPr sz="1600" b="1">
                 <a:solidFill>
-                  <a:srgbClr val="FFB020"/>
+                  <a:srgbClr val="B26B00"/>
                 </a:solidFill>
                 <a:latin typeface="Segoe UI"/>
               </a:rPr>
@@ -18231,7 +18231,7 @@
             <a:r>
               <a:rPr sz="1300">
                 <a:solidFill>
-                  <a:srgbClr val="F0F3F6"/>
+                  <a:srgbClr val="1F252D"/>
                 </a:solidFill>
                 <a:latin typeface="Segoe UI"/>
               </a:rPr>
@@ -18250,7 +18250,7 @@
             <a:r>
               <a:rPr sz="1300">
                 <a:solidFill>
-                  <a:srgbClr val="F0F3F6"/>
+                  <a:srgbClr val="1F252D"/>
                 </a:solidFill>
                 <a:latin typeface="Segoe UI"/>
               </a:rPr>
@@ -18269,7 +18269,7 @@
             <a:r>
               <a:rPr sz="1300">
                 <a:solidFill>
-                  <a:srgbClr val="F0F3F6"/>
+                  <a:srgbClr val="1F252D"/>
                 </a:solidFill>
                 <a:latin typeface="Segoe UI"/>
               </a:rPr>
@@ -18295,11 +18295,11 @@
             </a:avLst>
           </a:prstGeom>
           <a:solidFill>
-            <a:srgbClr val="161C24"/>
+            <a:srgbClr val="F6F8FA"/>
           </a:solidFill>
           <a:ln w="12700">
             <a:solidFill>
-              <a:srgbClr val="2A333F"/>
+              <a:srgbClr val="D5DBE1"/>
             </a:solidFill>
           </a:ln>
           <a:effectLst/>
@@ -18352,7 +18352,7 @@
             <a:r>
               <a:rPr sz="1600" b="1">
                 <a:solidFill>
-                  <a:srgbClr val="00E5A0"/>
+                  <a:srgbClr val="007A56"/>
                 </a:solidFill>
                 <a:latin typeface="Segoe UI"/>
               </a:rPr>
@@ -18394,7 +18394,7 @@
             <a:r>
               <a:rPr sz="1300">
                 <a:solidFill>
-                  <a:srgbClr val="F0F3F6"/>
+                  <a:srgbClr val="1F252D"/>
                 </a:solidFill>
                 <a:latin typeface="Segoe UI"/>
               </a:rPr>
@@ -18413,7 +18413,7 @@
             <a:r>
               <a:rPr sz="1300">
                 <a:solidFill>
-                  <a:srgbClr val="F0F3F6"/>
+                  <a:srgbClr val="1F252D"/>
                 </a:solidFill>
                 <a:latin typeface="Segoe UI"/>
               </a:rPr>
@@ -18455,7 +18455,7 @@
             <a:r>
               <a:rPr sz="1300">
                 <a:solidFill>
-                  <a:srgbClr val="F0F3F6"/>
+                  <a:srgbClr val="1F252D"/>
                 </a:solidFill>
                 <a:latin typeface="Segoe UI"/>
               </a:rPr>
@@ -18474,7 +18474,7 @@
             <a:r>
               <a:rPr sz="1300">
                 <a:solidFill>
-                  <a:srgbClr val="F0F3F6"/>
+                  <a:srgbClr val="1F252D"/>
                 </a:solidFill>
                 <a:latin typeface="Segoe UI"/>
               </a:rPr>
@@ -18509,7 +18509,7 @@
             <a:r>
               <a:rPr sz="1000" b="0">
                 <a:solidFill>
-                  <a:srgbClr val="9AA5B1"/>
+                  <a:srgbClr val="5A6673"/>
                 </a:solidFill>
                 <a:latin typeface="Segoe UI"/>
               </a:rPr>
@@ -18544,7 +18544,7 @@
             <a:r>
               <a:rPr sz="1000" b="0">
                 <a:solidFill>
-                  <a:srgbClr val="9AA5B1"/>
+                  <a:srgbClr val="5A6673"/>
                 </a:solidFill>
                 <a:latin typeface="Segoe UI"/>
               </a:rPr>

--- a/MobiScan_Presentation_15min.pptx
+++ b/MobiScan_Presentation_15min.pptx
@@ -4609,7 +4609,7 @@
             <a:avLst/>
           </a:prstGeom>
           <a:solidFill>
-            <a:srgbClr val="DEF2EC"/>
+            <a:srgbClr val="FBE9E9"/>
           </a:solidFill>
           <a:ln>
             <a:noFill/>
@@ -4664,7 +4664,7 @@
             <a:r>
               <a:rPr sz="1500" b="1">
                 <a:solidFill>
-                  <a:srgbClr val="007A56"/>
+                  <a:srgbClr val="C62828"/>
                 </a:solidFill>
                 <a:latin typeface="Segoe UI"/>
               </a:rPr>
@@ -4762,7 +4762,7 @@
           </a:solidFill>
           <a:ln w="12700">
             <a:solidFill>
-              <a:srgbClr val="007A56"/>
+              <a:srgbClr val="C62828"/>
             </a:solidFill>
           </a:ln>
           <a:effectLst/>
@@ -4789,7 +4789,7 @@
             <a:r>
               <a:rPr sz="1200" b="1">
                 <a:solidFill>
-                  <a:srgbClr val="007A56"/>
+                  <a:srgbClr val="C62828"/>
                 </a:solidFill>
                 <a:latin typeface="Segoe UI"/>
               </a:rPr>
@@ -4817,7 +4817,7 @@
           </a:solidFill>
           <a:ln w="12700">
             <a:solidFill>
-              <a:srgbClr val="0E7490"/>
+              <a:srgbClr val="8E0000"/>
             </a:solidFill>
           </a:ln>
           <a:effectLst/>
@@ -4844,7 +4844,7 @@
             <a:r>
               <a:rPr sz="1200" b="1">
                 <a:solidFill>
-                  <a:srgbClr val="0E7490"/>
+                  <a:srgbClr val="8E0000"/>
                 </a:solidFill>
                 <a:latin typeface="Segoe UI"/>
               </a:rPr>
@@ -4969,7 +4969,7 @@
             <a:r>
               <a:rPr sz="1300" b="0">
                 <a:solidFill>
-                  <a:srgbClr val="007A56"/>
+                  <a:srgbClr val="C62828"/>
                 </a:solidFill>
                 <a:latin typeface="Segoe UI"/>
               </a:rPr>
@@ -5055,7 +5055,7 @@
             <a:avLst/>
           </a:prstGeom>
           <a:solidFill>
-            <a:srgbClr val="007A56"/>
+            <a:srgbClr val="C62828"/>
           </a:solidFill>
           <a:ln>
             <a:noFill/>
@@ -5272,7 +5272,7 @@
             <a:r>
               <a:rPr sz="1600" b="1">
                 <a:solidFill>
-                  <a:srgbClr val="007A56"/>
+                  <a:srgbClr val="C62828"/>
                 </a:solidFill>
                 <a:latin typeface="Segoe UI"/>
               </a:rPr>
@@ -5314,7 +5314,7 @@
             <a:r>
               <a:rPr sz="1350" b="1">
                 <a:solidFill>
-                  <a:srgbClr val="007A56"/>
+                  <a:srgbClr val="C62828"/>
                 </a:solidFill>
                 <a:latin typeface="Segoe UI"/>
               </a:rPr>
@@ -5342,7 +5342,7 @@
             <a:r>
               <a:rPr sz="1350" b="1">
                 <a:solidFill>
-                  <a:srgbClr val="007A56"/>
+                  <a:srgbClr val="C62828"/>
                 </a:solidFill>
                 <a:latin typeface="Segoe UI"/>
               </a:rPr>
@@ -5370,7 +5370,7 @@
             <a:r>
               <a:rPr sz="1350" b="1">
                 <a:solidFill>
-                  <a:srgbClr val="007A56"/>
+                  <a:srgbClr val="C62828"/>
                 </a:solidFill>
                 <a:latin typeface="Segoe UI"/>
               </a:rPr>
@@ -5398,7 +5398,7 @@
             <a:r>
               <a:rPr sz="1350" b="1">
                 <a:solidFill>
-                  <a:srgbClr val="007A56"/>
+                  <a:srgbClr val="C62828"/>
                 </a:solidFill>
                 <a:latin typeface="Segoe UI"/>
               </a:rPr>
@@ -5426,7 +5426,7 @@
             <a:r>
               <a:rPr sz="1350" b="1">
                 <a:solidFill>
-                  <a:srgbClr val="007A56"/>
+                  <a:srgbClr val="C62828"/>
                 </a:solidFill>
                 <a:latin typeface="Segoe UI"/>
               </a:rPr>
@@ -5454,7 +5454,7 @@
             <a:r>
               <a:rPr sz="1350" b="1">
                 <a:solidFill>
-                  <a:srgbClr val="007A56"/>
+                  <a:srgbClr val="C62828"/>
                 </a:solidFill>
                 <a:latin typeface="Segoe UI"/>
               </a:rPr>
@@ -5546,7 +5546,7 @@
             <a:r>
               <a:rPr sz="1600" b="1">
                 <a:solidFill>
-                  <a:srgbClr val="0E7490"/>
+                  <a:srgbClr val="8E0000"/>
                 </a:solidFill>
                 <a:latin typeface="Segoe UI"/>
               </a:rPr>
@@ -5588,7 +5588,7 @@
             <a:r>
               <a:rPr sz="1350" b="1">
                 <a:solidFill>
-                  <a:srgbClr val="0E7490"/>
+                  <a:srgbClr val="8E0000"/>
                 </a:solidFill>
                 <a:latin typeface="Segoe UI"/>
               </a:rPr>
@@ -5616,7 +5616,7 @@
             <a:r>
               <a:rPr sz="1350" b="1">
                 <a:solidFill>
-                  <a:srgbClr val="0E7490"/>
+                  <a:srgbClr val="8E0000"/>
                 </a:solidFill>
                 <a:latin typeface="Segoe UI"/>
               </a:rPr>
@@ -5644,7 +5644,7 @@
             <a:r>
               <a:rPr sz="1350" b="1">
                 <a:solidFill>
-                  <a:srgbClr val="0E7490"/>
+                  <a:srgbClr val="8E0000"/>
                 </a:solidFill>
                 <a:latin typeface="Segoe UI"/>
               </a:rPr>
@@ -5672,7 +5672,7 @@
             <a:r>
               <a:rPr sz="1350" b="1">
                 <a:solidFill>
-                  <a:srgbClr val="0E7490"/>
+                  <a:srgbClr val="8E0000"/>
                 </a:solidFill>
                 <a:latin typeface="Segoe UI"/>
               </a:rPr>
@@ -5700,7 +5700,7 @@
             <a:r>
               <a:rPr sz="1350" b="1">
                 <a:solidFill>
-                  <a:srgbClr val="0E7490"/>
+                  <a:srgbClr val="8E0000"/>
                 </a:solidFill>
                 <a:latin typeface="Segoe UI"/>
               </a:rPr>
@@ -5728,7 +5728,7 @@
             <a:r>
               <a:rPr sz="1350" b="1">
                 <a:solidFill>
-                  <a:srgbClr val="0E7490"/>
+                  <a:srgbClr val="8E0000"/>
                 </a:solidFill>
                 <a:latin typeface="Segoe UI"/>
               </a:rPr>
@@ -5893,7 +5893,7 @@
             <a:avLst/>
           </a:prstGeom>
           <a:solidFill>
-            <a:srgbClr val="007A56"/>
+            <a:srgbClr val="C62828"/>
           </a:solidFill>
           <a:ln>
             <a:noFill/>
@@ -6110,7 +6110,7 @@
             <a:r>
               <a:rPr sz="1600" b="1">
                 <a:solidFill>
-                  <a:srgbClr val="007A56"/>
+                  <a:srgbClr val="C62828"/>
                 </a:solidFill>
                 <a:latin typeface="Segoe UI"/>
               </a:rPr>
@@ -6152,7 +6152,7 @@
             <a:r>
               <a:rPr sz="1300" b="1">
                 <a:solidFill>
-                  <a:srgbClr val="007A56"/>
+                  <a:srgbClr val="C62828"/>
                 </a:solidFill>
                 <a:latin typeface="Segoe UI"/>
               </a:rPr>
@@ -6180,7 +6180,7 @@
             <a:r>
               <a:rPr sz="1300" b="1">
                 <a:solidFill>
-                  <a:srgbClr val="007A56"/>
+                  <a:srgbClr val="C62828"/>
                 </a:solidFill>
                 <a:latin typeface="Segoe UI"/>
               </a:rPr>
@@ -6208,7 +6208,7 @@
             <a:r>
               <a:rPr sz="1300" b="1">
                 <a:solidFill>
-                  <a:srgbClr val="007A56"/>
+                  <a:srgbClr val="C62828"/>
                 </a:solidFill>
                 <a:latin typeface="Segoe UI"/>
               </a:rPr>
@@ -6236,7 +6236,7 @@
             <a:r>
               <a:rPr sz="1300" b="1">
                 <a:solidFill>
-                  <a:srgbClr val="007A56"/>
+                  <a:srgbClr val="C62828"/>
                 </a:solidFill>
                 <a:latin typeface="Segoe UI"/>
               </a:rPr>
@@ -6264,7 +6264,7 @@
             <a:r>
               <a:rPr sz="1300" b="1">
                 <a:solidFill>
-                  <a:srgbClr val="007A56"/>
+                  <a:srgbClr val="C62828"/>
                 </a:solidFill>
                 <a:latin typeface="Segoe UI"/>
               </a:rPr>
@@ -6292,7 +6292,7 @@
             <a:r>
               <a:rPr sz="1300" b="1">
                 <a:solidFill>
-                  <a:srgbClr val="007A56"/>
+                  <a:srgbClr val="C62828"/>
                 </a:solidFill>
                 <a:latin typeface="Segoe UI"/>
               </a:rPr>
@@ -6320,7 +6320,7 @@
             <a:r>
               <a:rPr sz="1300" b="1">
                 <a:solidFill>
-                  <a:srgbClr val="007A56"/>
+                  <a:srgbClr val="C62828"/>
                 </a:solidFill>
                 <a:latin typeface="Segoe UI"/>
               </a:rPr>
@@ -6348,7 +6348,7 @@
             <a:r>
               <a:rPr sz="1300" b="1">
                 <a:solidFill>
-                  <a:srgbClr val="007A56"/>
+                  <a:srgbClr val="C62828"/>
                 </a:solidFill>
                 <a:latin typeface="Segoe UI"/>
               </a:rPr>
@@ -6440,7 +6440,7 @@
             <a:r>
               <a:rPr sz="1600" b="1">
                 <a:solidFill>
-                  <a:srgbClr val="0E7490"/>
+                  <a:srgbClr val="8E0000"/>
                 </a:solidFill>
                 <a:latin typeface="Segoe UI"/>
               </a:rPr>
@@ -6733,7 +6733,7 @@
             <a:avLst/>
           </a:prstGeom>
           <a:solidFill>
-            <a:srgbClr val="007A56"/>
+            <a:srgbClr val="C62828"/>
           </a:solidFill>
           <a:ln>
             <a:noFill/>
@@ -6902,7 +6902,7 @@
             <a:r>
               <a:rPr sz="1300" b="1">
                 <a:solidFill>
-                  <a:srgbClr val="007A56"/>
+                  <a:srgbClr val="C62828"/>
                 </a:solidFill>
                 <a:latin typeface="Segoe UI"/>
               </a:rPr>
@@ -6937,7 +6937,7 @@
             <a:r>
               <a:rPr sz="1300" b="1">
                 <a:solidFill>
-                  <a:srgbClr val="007A56"/>
+                  <a:srgbClr val="C62828"/>
                 </a:solidFill>
                 <a:latin typeface="Segoe UI"/>
               </a:rPr>
@@ -6972,7 +6972,7 @@
             <a:r>
               <a:rPr sz="1300" b="1">
                 <a:solidFill>
-                  <a:srgbClr val="007A56"/>
+                  <a:srgbClr val="C62828"/>
                 </a:solidFill>
                 <a:latin typeface="Segoe UI"/>
               </a:rPr>
@@ -7125,7 +7125,7 @@
             <a:r>
               <a:rPr sz="1250" b="1">
                 <a:solidFill>
-                  <a:srgbClr val="007A56"/>
+                  <a:srgbClr val="C62828"/>
                 </a:solidFill>
                 <a:latin typeface="Segoe UI"/>
               </a:rPr>
@@ -7278,7 +7278,7 @@
             <a:r>
               <a:rPr sz="1250" b="1">
                 <a:solidFill>
-                  <a:srgbClr val="007A56"/>
+                  <a:srgbClr val="C62828"/>
                 </a:solidFill>
                 <a:latin typeface="Segoe UI"/>
               </a:rPr>
@@ -7431,7 +7431,7 @@
             <a:r>
               <a:rPr sz="1250" b="1">
                 <a:solidFill>
-                  <a:srgbClr val="0E7490"/>
+                  <a:srgbClr val="8E0000"/>
                 </a:solidFill>
                 <a:latin typeface="Segoe UI"/>
               </a:rPr>
@@ -8043,7 +8043,7 @@
             <a:r>
               <a:rPr sz="1250" b="1">
                 <a:solidFill>
-                  <a:srgbClr val="0E7490"/>
+                  <a:srgbClr val="8E0000"/>
                 </a:solidFill>
                 <a:latin typeface="Segoe UI"/>
               </a:rPr>
@@ -8199,7 +8199,7 @@
             <a:avLst/>
           </a:prstGeom>
           <a:solidFill>
-            <a:srgbClr val="007A56"/>
+            <a:srgbClr val="C62828"/>
           </a:solidFill>
           <a:ln>
             <a:noFill/>
@@ -8416,7 +8416,7 @@
             <a:r>
               <a:rPr sz="1500" b="1">
                 <a:solidFill>
-                  <a:srgbClr val="007A56"/>
+                  <a:srgbClr val="C62828"/>
                 </a:solidFill>
                 <a:latin typeface="Segoe UI"/>
               </a:rPr>
@@ -8534,7 +8534,7 @@
             <a:r>
               <a:rPr sz="1500" b="1">
                 <a:solidFill>
-                  <a:srgbClr val="007A56"/>
+                  <a:srgbClr val="C62828"/>
                 </a:solidFill>
                 <a:latin typeface="Segoe UI"/>
               </a:rPr>
@@ -8652,7 +8652,7 @@
             <a:r>
               <a:rPr sz="1500" b="1">
                 <a:solidFill>
-                  <a:srgbClr val="007A56"/>
+                  <a:srgbClr val="C62828"/>
                 </a:solidFill>
                 <a:latin typeface="Segoe UI"/>
               </a:rPr>
@@ -8770,7 +8770,7 @@
             <a:r>
               <a:rPr sz="1500" b="1">
                 <a:solidFill>
-                  <a:srgbClr val="007A56"/>
+                  <a:srgbClr val="C62828"/>
                 </a:solidFill>
                 <a:latin typeface="Segoe UI"/>
               </a:rPr>
@@ -8888,7 +8888,7 @@
             <a:r>
               <a:rPr sz="1500" b="1">
                 <a:solidFill>
-                  <a:srgbClr val="007A56"/>
+                  <a:srgbClr val="C62828"/>
                 </a:solidFill>
                 <a:latin typeface="Segoe UI"/>
               </a:rPr>
@@ -9006,7 +9006,7 @@
             <a:r>
               <a:rPr sz="1500" b="1">
                 <a:solidFill>
-                  <a:srgbClr val="007A56"/>
+                  <a:srgbClr val="C62828"/>
                 </a:solidFill>
                 <a:latin typeface="Segoe UI"/>
               </a:rPr>
@@ -9124,7 +9124,7 @@
             <a:r>
               <a:rPr sz="1500" b="1">
                 <a:solidFill>
-                  <a:srgbClr val="0E7490"/>
+                  <a:srgbClr val="8E0000"/>
                 </a:solidFill>
                 <a:latin typeface="Segoe UI"/>
               </a:rPr>
@@ -9315,7 +9315,7 @@
             <a:avLst/>
           </a:prstGeom>
           <a:solidFill>
-            <a:srgbClr val="DEF2EC"/>
+            <a:srgbClr val="FBE9E9"/>
           </a:solidFill>
           <a:ln>
             <a:noFill/>
@@ -9405,7 +9405,7 @@
             <a:r>
               <a:rPr sz="2400" b="1">
                 <a:solidFill>
-                  <a:srgbClr val="007A56"/>
+                  <a:srgbClr val="C62828"/>
                 </a:solidFill>
                 <a:latin typeface="Segoe UI"/>
               </a:rPr>
@@ -9526,7 +9526,7 @@
             <a:avLst/>
           </a:prstGeom>
           <a:solidFill>
-            <a:srgbClr val="007A56"/>
+            <a:srgbClr val="C62828"/>
           </a:solidFill>
           <a:ln>
             <a:noFill/>
@@ -9743,7 +9743,7 @@
             <a:r>
               <a:rPr sz="2000" b="1">
                 <a:solidFill>
-                  <a:srgbClr val="007A56"/>
+                  <a:srgbClr val="C62828"/>
                 </a:solidFill>
                 <a:latin typeface="Segoe UI"/>
               </a:rPr>
@@ -9841,7 +9841,7 @@
           </a:solidFill>
           <a:ln w="12700">
             <a:solidFill>
-              <a:srgbClr val="0E7490"/>
+              <a:srgbClr val="8E0000"/>
             </a:solidFill>
           </a:ln>
           <a:effectLst/>
@@ -9868,7 +9868,7 @@
             <a:r>
               <a:rPr sz="1100" b="1">
                 <a:solidFill>
-                  <a:srgbClr val="0E7490"/>
+                  <a:srgbClr val="8E0000"/>
                 </a:solidFill>
                 <a:latin typeface="Segoe UI"/>
               </a:rPr>
@@ -9951,7 +9951,7 @@
             <a:r>
               <a:rPr sz="2000" b="1">
                 <a:solidFill>
-                  <a:srgbClr val="007A56"/>
+                  <a:srgbClr val="C62828"/>
                 </a:solidFill>
                 <a:latin typeface="Segoe UI"/>
               </a:rPr>
@@ -10049,7 +10049,7 @@
           </a:solidFill>
           <a:ln w="12700">
             <a:solidFill>
-              <a:srgbClr val="0E7490"/>
+              <a:srgbClr val="8E0000"/>
             </a:solidFill>
           </a:ln>
           <a:effectLst/>
@@ -10076,7 +10076,7 @@
             <a:r>
               <a:rPr sz="1100" b="1">
                 <a:solidFill>
-                  <a:srgbClr val="0E7490"/>
+                  <a:srgbClr val="8E0000"/>
                 </a:solidFill>
                 <a:latin typeface="Segoe UI"/>
               </a:rPr>
@@ -10159,7 +10159,7 @@
             <a:r>
               <a:rPr sz="2000" b="1">
                 <a:solidFill>
-                  <a:srgbClr val="007A56"/>
+                  <a:srgbClr val="C62828"/>
                 </a:solidFill>
                 <a:latin typeface="Segoe UI"/>
               </a:rPr>
@@ -10257,7 +10257,7 @@
           </a:solidFill>
           <a:ln w="12700">
             <a:solidFill>
-              <a:srgbClr val="0E7490"/>
+              <a:srgbClr val="8E0000"/>
             </a:solidFill>
           </a:ln>
           <a:effectLst/>
@@ -10284,7 +10284,7 @@
             <a:r>
               <a:rPr sz="1100" b="1">
                 <a:solidFill>
-                  <a:srgbClr val="0E7490"/>
+                  <a:srgbClr val="8E0000"/>
                 </a:solidFill>
                 <a:latin typeface="Segoe UI"/>
               </a:rPr>
@@ -10367,7 +10367,7 @@
             <a:r>
               <a:rPr sz="2000" b="1">
                 <a:solidFill>
-                  <a:srgbClr val="007A56"/>
+                  <a:srgbClr val="C62828"/>
                 </a:solidFill>
                 <a:latin typeface="Segoe UI"/>
               </a:rPr>
@@ -10465,7 +10465,7 @@
           </a:solidFill>
           <a:ln w="12700">
             <a:solidFill>
-              <a:srgbClr val="0E7490"/>
+              <a:srgbClr val="8E0000"/>
             </a:solidFill>
           </a:ln>
           <a:effectLst/>
@@ -10492,7 +10492,7 @@
             <a:r>
               <a:rPr sz="1100" b="1">
                 <a:solidFill>
-                  <a:srgbClr val="0E7490"/>
+                  <a:srgbClr val="8E0000"/>
                 </a:solidFill>
                 <a:latin typeface="Segoe UI"/>
               </a:rPr>
@@ -10575,7 +10575,7 @@
             <a:r>
               <a:rPr sz="2000" b="1">
                 <a:solidFill>
-                  <a:srgbClr val="007A56"/>
+                  <a:srgbClr val="C62828"/>
                 </a:solidFill>
                 <a:latin typeface="Segoe UI"/>
               </a:rPr>
@@ -10673,7 +10673,7 @@
           </a:solidFill>
           <a:ln w="12700">
             <a:solidFill>
-              <a:srgbClr val="0E7490"/>
+              <a:srgbClr val="8E0000"/>
             </a:solidFill>
           </a:ln>
           <a:effectLst/>
@@ -10700,7 +10700,7 @@
             <a:r>
               <a:rPr sz="1100" b="1">
                 <a:solidFill>
-                  <a:srgbClr val="0E7490"/>
+                  <a:srgbClr val="8E0000"/>
                 </a:solidFill>
                 <a:latin typeface="Segoe UI"/>
               </a:rPr>
@@ -10783,7 +10783,7 @@
             <a:r>
               <a:rPr sz="2000" b="1">
                 <a:solidFill>
-                  <a:srgbClr val="007A56"/>
+                  <a:srgbClr val="C62828"/>
                 </a:solidFill>
                 <a:latin typeface="Segoe UI"/>
               </a:rPr>
@@ -10881,7 +10881,7 @@
           </a:solidFill>
           <a:ln w="12700">
             <a:solidFill>
-              <a:srgbClr val="0E7490"/>
+              <a:srgbClr val="8E0000"/>
             </a:solidFill>
           </a:ln>
           <a:effectLst/>
@@ -10908,7 +10908,7 @@
             <a:r>
               <a:rPr sz="1100" b="1">
                 <a:solidFill>
-                  <a:srgbClr val="0E7490"/>
+                  <a:srgbClr val="8E0000"/>
                 </a:solidFill>
                 <a:latin typeface="Segoe UI"/>
               </a:rPr>
@@ -10991,7 +10991,7 @@
             <a:r>
               <a:rPr sz="2000" b="1">
                 <a:solidFill>
-                  <a:srgbClr val="007A56"/>
+                  <a:srgbClr val="C62828"/>
                 </a:solidFill>
                 <a:latin typeface="Segoe UI"/>
               </a:rPr>
@@ -11089,7 +11089,7 @@
           </a:solidFill>
           <a:ln w="12700">
             <a:solidFill>
-              <a:srgbClr val="0E7490"/>
+              <a:srgbClr val="8E0000"/>
             </a:solidFill>
           </a:ln>
           <a:effectLst/>
@@ -11116,7 +11116,7 @@
             <a:r>
               <a:rPr sz="1100" b="1">
                 <a:solidFill>
-                  <a:srgbClr val="0E7490"/>
+                  <a:srgbClr val="8E0000"/>
                 </a:solidFill>
                 <a:latin typeface="Segoe UI"/>
               </a:rPr>
@@ -11272,7 +11272,7 @@
             <a:avLst/>
           </a:prstGeom>
           <a:solidFill>
-            <a:srgbClr val="007A56"/>
+            <a:srgbClr val="C62828"/>
           </a:solidFill>
           <a:ln>
             <a:noFill/>
@@ -11709,7 +11709,7 @@
             <a:r>
               <a:rPr sz="1800" b="1">
                 <a:solidFill>
-                  <a:srgbClr val="007A56"/>
+                  <a:srgbClr val="C62828"/>
                 </a:solidFill>
                 <a:latin typeface="Segoe UI"/>
               </a:rPr>
@@ -12002,7 +12002,7 @@
             <a:avLst/>
           </a:prstGeom>
           <a:solidFill>
-            <a:srgbClr val="007A56"/>
+            <a:srgbClr val="C62828"/>
           </a:solidFill>
           <a:ln>
             <a:noFill/>
@@ -12166,7 +12166,7 @@
           </a:solidFill>
           <a:ln w="17780">
             <a:solidFill>
-              <a:srgbClr val="007A56"/>
+              <a:srgbClr val="C62828"/>
             </a:solidFill>
           </a:ln>
           <a:effectLst/>
@@ -12219,7 +12219,7 @@
             <a:r>
               <a:rPr sz="1400" b="1">
                 <a:solidFill>
-                  <a:srgbClr val="007A56"/>
+                  <a:srgbClr val="C62828"/>
                 </a:solidFill>
                 <a:latin typeface="Segoe UI"/>
               </a:rPr>
@@ -12290,7 +12290,7 @@
             <a:r>
               <a:rPr sz="2000" b="1">
                 <a:solidFill>
-                  <a:srgbClr val="007A56"/>
+                  <a:srgbClr val="C62828"/>
                 </a:solidFill>
                 <a:latin typeface="Segoe UI"/>
               </a:rPr>
@@ -12320,7 +12320,7 @@
           </a:solidFill>
           <a:ln w="17780">
             <a:solidFill>
-              <a:srgbClr val="0E7490"/>
+              <a:srgbClr val="8E0000"/>
             </a:solidFill>
           </a:ln>
           <a:effectLst/>
@@ -12373,7 +12373,7 @@
             <a:r>
               <a:rPr sz="1400" b="1">
                 <a:solidFill>
-                  <a:srgbClr val="0E7490"/>
+                  <a:srgbClr val="8E0000"/>
                 </a:solidFill>
                 <a:latin typeface="Segoe UI"/>
               </a:rPr>
@@ -12444,7 +12444,7 @@
             <a:r>
               <a:rPr sz="2000" b="1">
                 <a:solidFill>
-                  <a:srgbClr val="007A56"/>
+                  <a:srgbClr val="C62828"/>
                 </a:solidFill>
                 <a:latin typeface="Segoe UI"/>
               </a:rPr>
@@ -12598,7 +12598,7 @@
             <a:r>
               <a:rPr sz="2000" b="1">
                 <a:solidFill>
-                  <a:srgbClr val="007A56"/>
+                  <a:srgbClr val="C62828"/>
                 </a:solidFill>
                 <a:latin typeface="Segoe UI"/>
               </a:rPr>
@@ -12752,7 +12752,7 @@
             <a:r>
               <a:rPr sz="2000" b="1">
                 <a:solidFill>
-                  <a:srgbClr val="007A56"/>
+                  <a:srgbClr val="C62828"/>
                 </a:solidFill>
                 <a:latin typeface="Segoe UI"/>
               </a:rPr>
@@ -12782,7 +12782,7 @@
           </a:solidFill>
           <a:ln w="17780">
             <a:solidFill>
-              <a:srgbClr val="007A56"/>
+              <a:srgbClr val="C62828"/>
             </a:solidFill>
           </a:ln>
           <a:effectLst/>
@@ -12835,7 +12835,7 @@
             <a:r>
               <a:rPr sz="1400" b="1">
                 <a:solidFill>
-                  <a:srgbClr val="007A56"/>
+                  <a:srgbClr val="C62828"/>
                 </a:solidFill>
                 <a:latin typeface="Segoe UI"/>
               </a:rPr>
@@ -12954,7 +12954,7 @@
             <a:r>
               <a:rPr sz="1400" b="1">
                 <a:solidFill>
-                  <a:srgbClr val="007A56"/>
+                  <a:srgbClr val="C62828"/>
                 </a:solidFill>
                 <a:latin typeface="Consolas"/>
               </a:rPr>
@@ -13072,7 +13072,7 @@
             <a:r>
               <a:rPr sz="1400" b="1">
                 <a:solidFill>
-                  <a:srgbClr val="007A56"/>
+                  <a:srgbClr val="C62828"/>
                 </a:solidFill>
                 <a:latin typeface="Consolas"/>
               </a:rPr>
@@ -13190,7 +13190,7 @@
             <a:r>
               <a:rPr sz="1400" b="1">
                 <a:solidFill>
-                  <a:srgbClr val="007A56"/>
+                  <a:srgbClr val="C62828"/>
                 </a:solidFill>
                 <a:latin typeface="Consolas"/>
               </a:rPr>
@@ -13308,7 +13308,7 @@
             <a:r>
               <a:rPr sz="1400" b="1">
                 <a:solidFill>
-                  <a:srgbClr val="007A56"/>
+                  <a:srgbClr val="C62828"/>
                 </a:solidFill>
                 <a:latin typeface="Consolas"/>
               </a:rPr>
@@ -13426,7 +13426,7 @@
             <a:r>
               <a:rPr sz="1400" b="1">
                 <a:solidFill>
-                  <a:srgbClr val="007A56"/>
+                  <a:srgbClr val="C62828"/>
                 </a:solidFill>
                 <a:latin typeface="Consolas"/>
               </a:rPr>
@@ -13544,7 +13544,7 @@
             <a:r>
               <a:rPr sz="1400" b="1">
                 <a:solidFill>
-                  <a:srgbClr val="007A56"/>
+                  <a:srgbClr val="C62828"/>
                 </a:solidFill>
                 <a:latin typeface="Consolas"/>
               </a:rPr>
@@ -13614,7 +13614,7 @@
             <a:r>
               <a:rPr sz="1300" b="0">
                 <a:solidFill>
-                  <a:srgbClr val="0E7490"/>
+                  <a:srgbClr val="8E0000"/>
                 </a:solidFill>
                 <a:latin typeface="Segoe UI"/>
               </a:rPr>
@@ -13770,7 +13770,7 @@
             <a:avLst/>
           </a:prstGeom>
           <a:solidFill>
-            <a:srgbClr val="007A56"/>
+            <a:srgbClr val="C62828"/>
           </a:solidFill>
           <a:ln>
             <a:noFill/>
@@ -13987,7 +13987,7 @@
             <a:r>
               <a:rPr sz="3400" b="1">
                 <a:solidFill>
-                  <a:srgbClr val="007A56"/>
+                  <a:srgbClr val="C62828"/>
                 </a:solidFill>
                 <a:latin typeface="Segoe UI"/>
               </a:rPr>
@@ -14105,7 +14105,7 @@
             <a:r>
               <a:rPr sz="3400" b="1">
                 <a:solidFill>
-                  <a:srgbClr val="0E7490"/>
+                  <a:srgbClr val="8E0000"/>
                 </a:solidFill>
                 <a:latin typeface="Segoe UI"/>
               </a:rPr>
@@ -14341,7 +14341,7 @@
             <a:r>
               <a:rPr sz="3400" b="1">
                 <a:solidFill>
-                  <a:srgbClr val="007A56"/>
+                  <a:srgbClr val="C62828"/>
                 </a:solidFill>
                 <a:latin typeface="Segoe UI"/>
               </a:rPr>
@@ -14577,7 +14577,7 @@
             <a:r>
               <a:rPr sz="1600" b="1">
                 <a:solidFill>
-                  <a:srgbClr val="007A56"/>
+                  <a:srgbClr val="C62828"/>
                 </a:solidFill>
                 <a:latin typeface="Segoe UI"/>
               </a:rPr>
@@ -14778,7 +14778,7 @@
             <a:r>
               <a:rPr sz="1600" b="1">
                 <a:solidFill>
-                  <a:srgbClr val="007A56"/>
+                  <a:srgbClr val="C62828"/>
                 </a:solidFill>
                 <a:latin typeface="Segoe UI"/>
               </a:rPr>
@@ -15052,7 +15052,7 @@
             <a:avLst/>
           </a:prstGeom>
           <a:solidFill>
-            <a:srgbClr val="007A56"/>
+            <a:srgbClr val="C62828"/>
           </a:solidFill>
           <a:ln>
             <a:noFill/>
@@ -15258,7 +15258,7 @@
             <a:avLst/>
           </a:prstGeom>
           <a:solidFill>
-            <a:srgbClr val="007A56"/>
+            <a:srgbClr val="C62828"/>
           </a:solidFill>
           <a:ln>
             <a:noFill/>
@@ -15392,7 +15392,7 @@
             <a:r>
               <a:rPr sz="1800" b="1">
                 <a:solidFill>
-                  <a:srgbClr val="0E7490"/>
+                  <a:srgbClr val="8E0000"/>
                 </a:solidFill>
                 <a:latin typeface="Segoe UI"/>
               </a:rPr>
@@ -15464,7 +15464,7 @@
             <a:avLst/>
           </a:prstGeom>
           <a:solidFill>
-            <a:srgbClr val="007A56"/>
+            <a:srgbClr val="C62828"/>
           </a:solidFill>
           <a:ln>
             <a:noFill/>
@@ -15598,7 +15598,7 @@
             <a:r>
               <a:rPr sz="1800" b="1">
                 <a:solidFill>
-                  <a:srgbClr val="0E7490"/>
+                  <a:srgbClr val="8E0000"/>
                 </a:solidFill>
                 <a:latin typeface="Segoe UI"/>
               </a:rPr>
@@ -15670,7 +15670,7 @@
             <a:avLst/>
           </a:prstGeom>
           <a:solidFill>
-            <a:srgbClr val="007A56"/>
+            <a:srgbClr val="C62828"/>
           </a:solidFill>
           <a:ln>
             <a:noFill/>
@@ -15804,7 +15804,7 @@
             <a:r>
               <a:rPr sz="1800" b="1">
                 <a:solidFill>
-                  <a:srgbClr val="0E7490"/>
+                  <a:srgbClr val="8E0000"/>
                 </a:solidFill>
                 <a:latin typeface="Segoe UI"/>
               </a:rPr>
@@ -15876,7 +15876,7 @@
             <a:avLst/>
           </a:prstGeom>
           <a:solidFill>
-            <a:srgbClr val="007A56"/>
+            <a:srgbClr val="C62828"/>
           </a:solidFill>
           <a:ln>
             <a:noFill/>
@@ -16010,7 +16010,7 @@
             <a:r>
               <a:rPr sz="1800" b="1">
                 <a:solidFill>
-                  <a:srgbClr val="0E7490"/>
+                  <a:srgbClr val="8E0000"/>
                 </a:solidFill>
                 <a:latin typeface="Segoe UI"/>
               </a:rPr>
@@ -16082,7 +16082,7 @@
             <a:avLst/>
           </a:prstGeom>
           <a:solidFill>
-            <a:srgbClr val="007A56"/>
+            <a:srgbClr val="C62828"/>
           </a:solidFill>
           <a:ln>
             <a:noFill/>
@@ -16264,7 +16264,7 @@
             <a:r>
               <a:rPr sz="1600" b="1">
                 <a:solidFill>
-                  <a:srgbClr val="007A56"/>
+                  <a:srgbClr val="C62828"/>
                 </a:solidFill>
                 <a:latin typeface="Segoe UI"/>
               </a:rPr>
@@ -16446,7 +16446,7 @@
             <a:r>
               <a:rPr sz="1600" b="1">
                 <a:solidFill>
-                  <a:srgbClr val="0E7490"/>
+                  <a:srgbClr val="8E0000"/>
                 </a:solidFill>
                 <a:latin typeface="Segoe UI"/>
               </a:rPr>
@@ -16701,7 +16701,7 @@
             <a:avLst/>
           </a:prstGeom>
           <a:solidFill>
-            <a:srgbClr val="007A56"/>
+            <a:srgbClr val="C62828"/>
           </a:solidFill>
           <a:ln>
             <a:noFill/>
@@ -16918,7 +16918,7 @@
             <a:r>
               <a:rPr sz="1600" b="1">
                 <a:solidFill>
-                  <a:srgbClr val="007A56"/>
+                  <a:srgbClr val="C62828"/>
                 </a:solidFill>
                 <a:latin typeface="Segoe UI"/>
               </a:rPr>
@@ -16960,7 +16960,7 @@
             <a:r>
               <a:rPr sz="1350" b="1">
                 <a:solidFill>
-                  <a:srgbClr val="007A56"/>
+                  <a:srgbClr val="C62828"/>
                 </a:solidFill>
                 <a:latin typeface="Segoe UI"/>
               </a:rPr>
@@ -16988,7 +16988,7 @@
             <a:r>
               <a:rPr sz="1350" b="1">
                 <a:solidFill>
-                  <a:srgbClr val="007A56"/>
+                  <a:srgbClr val="C62828"/>
                 </a:solidFill>
                 <a:latin typeface="Segoe UI"/>
               </a:rPr>
@@ -17016,7 +17016,7 @@
             <a:r>
               <a:rPr sz="1350" b="1">
                 <a:solidFill>
-                  <a:srgbClr val="007A56"/>
+                  <a:srgbClr val="C62828"/>
                 </a:solidFill>
                 <a:latin typeface="Segoe UI"/>
               </a:rPr>
@@ -17044,7 +17044,7 @@
             <a:r>
               <a:rPr sz="1350" b="1">
                 <a:solidFill>
-                  <a:srgbClr val="007A56"/>
+                  <a:srgbClr val="C62828"/>
                 </a:solidFill>
                 <a:latin typeface="Segoe UI"/>
               </a:rPr>
@@ -17072,7 +17072,7 @@
             <a:r>
               <a:rPr sz="1350" b="1">
                 <a:solidFill>
-                  <a:srgbClr val="007A56"/>
+                  <a:srgbClr val="C62828"/>
                 </a:solidFill>
                 <a:latin typeface="Segoe UI"/>
               </a:rPr>
@@ -17164,7 +17164,7 @@
             <a:r>
               <a:rPr sz="1600" b="1">
                 <a:solidFill>
-                  <a:srgbClr val="0E7490"/>
+                  <a:srgbClr val="8E0000"/>
                 </a:solidFill>
                 <a:latin typeface="Segoe UI"/>
               </a:rPr>
@@ -17468,7 +17468,7 @@
             <a:r>
               <a:rPr sz="5400" b="1">
                 <a:solidFill>
-                  <a:srgbClr val="007A56"/>
+                  <a:srgbClr val="C62828"/>
                 </a:solidFill>
                 <a:latin typeface="Segoe UI"/>
               </a:rPr>
@@ -17531,7 +17531,7 @@
           </a:solidFill>
           <a:ln w="12700">
             <a:solidFill>
-              <a:srgbClr val="0E7490"/>
+              <a:srgbClr val="8E0000"/>
             </a:solidFill>
           </a:ln>
           <a:effectLst/>
@@ -17558,7 +17558,7 @@
             <a:r>
               <a:rPr sz="1200" b="1">
                 <a:solidFill>
-                  <a:srgbClr val="0E7490"/>
+                  <a:srgbClr val="8E0000"/>
                 </a:solidFill>
                 <a:latin typeface="Segoe UI"/>
               </a:rPr>
@@ -17586,7 +17586,7 @@
           </a:solidFill>
           <a:ln w="12700">
             <a:solidFill>
-              <a:srgbClr val="0E7490"/>
+              <a:srgbClr val="8E0000"/>
             </a:solidFill>
           </a:ln>
           <a:effectLst/>
@@ -17613,7 +17613,7 @@
             <a:r>
               <a:rPr sz="1200" b="1">
                 <a:solidFill>
-                  <a:srgbClr val="0E7490"/>
+                  <a:srgbClr val="8E0000"/>
                 </a:solidFill>
                 <a:latin typeface="Segoe UI"/>
               </a:rPr>
@@ -17641,7 +17641,7 @@
           </a:solidFill>
           <a:ln w="12700">
             <a:solidFill>
-              <a:srgbClr val="0E7490"/>
+              <a:srgbClr val="8E0000"/>
             </a:solidFill>
           </a:ln>
           <a:effectLst/>
@@ -17668,7 +17668,7 @@
             <a:r>
               <a:rPr sz="1200" b="1">
                 <a:solidFill>
-                  <a:srgbClr val="0E7490"/>
+                  <a:srgbClr val="8E0000"/>
                 </a:solidFill>
                 <a:latin typeface="Segoe UI"/>
               </a:rPr>
@@ -17696,7 +17696,7 @@
           </a:solidFill>
           <a:ln w="12700">
             <a:solidFill>
-              <a:srgbClr val="0E7490"/>
+              <a:srgbClr val="8E0000"/>
             </a:solidFill>
           </a:ln>
           <a:effectLst/>
@@ -17723,7 +17723,7 @@
             <a:r>
               <a:rPr sz="1200" b="1">
                 <a:solidFill>
-                  <a:srgbClr val="0E7490"/>
+                  <a:srgbClr val="8E0000"/>
                 </a:solidFill>
                 <a:latin typeface="Segoe UI"/>
               </a:rPr>
@@ -17809,7 +17809,7 @@
             <a:avLst/>
           </a:prstGeom>
           <a:solidFill>
-            <a:srgbClr val="007A56"/>
+            <a:srgbClr val="C62828"/>
           </a:solidFill>
           <a:ln>
             <a:noFill/>
@@ -18352,7 +18352,7 @@
             <a:r>
               <a:rPr sz="1600" b="1">
                 <a:solidFill>
-                  <a:srgbClr val="007A56"/>
+                  <a:srgbClr val="C62828"/>
                 </a:solidFill>
                 <a:latin typeface="Segoe UI"/>
               </a:rPr>
